--- a/report/AI电商行业研究_沃尔玛中国CTO汇报.pptx
+++ b/report/AI电商行业研究_沃尔玛中国CTO汇报.pptx
@@ -23,6 +23,7 @@
     <p:sldId id="271" r:id="rId22"/>
     <p:sldId id="272" r:id="rId23"/>
     <p:sldId id="273" r:id="rId24"/>
+    <p:sldId id="274" r:id="rId25"/>
   </p:sldIdLst>
   <p:sldSz cx="12191695" cy="6858000" type="screen4x3"/>
   <p:notesSz cx="6858000" cy="9144000"/>
@@ -3302,7 +3303,7 @@
                 <a:latin typeface="Microsoft YaHei"/>
                 <a:ea typeface="Microsoft YaHei"/>
               </a:rPr>
-              <a:t>版本：预读版 v1.0 ｜ 数据截至 2026-07 ｜ 配套预读文档 30 分钟</a:t>
+              <a:t>版本：预读版 v1.1 ｜ 数据截至 2026-07 ｜ 配套预读文档 30 分钟</a:t>
             </a:r>
           </a:p>
           <a:p>
@@ -3438,7 +3439,7 @@
                 <a:latin typeface="Microsoft YaHei"/>
                 <a:ea typeface="Microsoft YaHei"/>
               </a:rPr>
-              <a:t>中国战场 2/4</a:t>
+              <a:t>中国战场 1/4</a:t>
             </a:r>
           </a:p>
         </p:txBody>
@@ -3478,7 +3479,7 @@
                 <a:latin typeface="Microsoft YaHei"/>
                 <a:ea typeface="Microsoft YaHei"/>
               </a:rPr>
-              <a:t>入口体量：豆包已达 3.83 亿月活；京东自报数据以斜纹降级呈现</a:t>
+              <a:t>入口格局：五类玩家已就位，微信系联盟模式与沃尔玛通道天然契合</a:t>
             </a:r>
           </a:p>
         </p:txBody>
@@ -3518,35 +3519,603 @@
                 <a:latin typeface="Microsoft YaHei"/>
                 <a:ea typeface="Microsoft YaHei"/>
               </a:rPr>
-              <a:t>沃尔玛中国 CTO 汇报｜AI 电商行业研究（预读版 v1.0）｜数据截至 2026-07｜内部资料·注意保密｜10</a:t>
-            </a:r>
-          </a:p>
-        </p:txBody>
-      </p:sp>
-      <p:pic>
-        <p:nvPicPr>
-          <p:cNvPr id="6" name="Picture 5" descr="04_ai_entrance_user_scale.png"/>
-          <p:cNvPicPr>
-            <a:picLocks noChangeAspect="1"/>
-          </p:cNvPicPr>
+              <a:t>沃尔玛中国 CTO 汇报｜AI 电商行业研究（预读版 v1.1）｜数据截至 2026-07｜内部资料·注意保密｜10</a:t>
+            </a:r>
+          </a:p>
+        </p:txBody>
+      </p:sp>
+      <p:graphicFrame>
+        <p:nvGraphicFramePr>
+          <p:cNvPr id="6" name="Table 5"/>
+          <p:cNvGraphicFramePr>
+            <a:graphicFrameLocks noGrp="1"/>
+          </p:cNvGraphicFramePr>
           <p:nvPr/>
-        </p:nvPicPr>
-        <p:blipFill>
-          <a:blip r:embed="rId2"/>
-          <a:stretch>
-            <a:fillRect/>
-          </a:stretch>
-        </p:blipFill>
-        <p:spPr>
-          <a:xfrm>
-            <a:off x="1622735" y="1600200"/>
-            <a:ext cx="8946224" cy="4160520"/>
-          </a:xfrm>
-          <a:prstGeom prst="rect">
-            <a:avLst/>
-          </a:prstGeom>
-        </p:spPr>
-      </p:pic>
+        </p:nvGraphicFramePr>
+        <p:xfrm>
+          <a:off x="731520" y="1600200"/>
+          <a:ext cx="10972800" cy="3950208"/>
+        </p:xfrm>
+        <a:graphic>
+          <a:graphicData uri="http://schemas.openxmlformats.org/drawingml/2006/table">
+            <a:tbl>
+              <a:tblPr firstRow="1" bandRow="1">
+                <a:tableStyleId>{5C22544A-7EE6-4342-B048-85BDC9FD1C3A}</a:tableStyleId>
+              </a:tblPr>
+              <a:tblGrid>
+                <a:gridCol w="1828800"/>
+                <a:gridCol w="1371600"/>
+                <a:gridCol w="4206240"/>
+                <a:gridCol w="3566160"/>
+              </a:tblGrid>
+              <a:tr h="658368">
+                <a:tc>
+                  <a:txBody>
+                    <a:bodyPr/>
+                    <a:lstStyle/>
+                    <a:p>
+                      <a:r>
+                        <a:rPr sz="1050" b="1">
+                          <a:solidFill>
+                            <a:srgbClr val="FFFFFF"/>
+                          </a:solidFill>
+                          <a:latin typeface="Microsoft YaHei"/>
+                          <a:ea typeface="Microsoft YaHei"/>
+                        </a:rPr>
+                        <a:t>阵营</a:t>
+                      </a:r>
+                    </a:p>
+                  </a:txBody>
+                  <a:tcPr>
+                    <a:solidFill>
+                      <a:srgbClr val="0071CE"/>
+                    </a:solidFill>
+                  </a:tcPr>
+                </a:tc>
+                <a:tc>
+                  <a:txBody>
+                    <a:bodyPr/>
+                    <a:lstStyle/>
+                    <a:p>
+                      <a:r>
+                        <a:rPr sz="1050" b="1">
+                          <a:solidFill>
+                            <a:srgbClr val="FFFFFF"/>
+                          </a:solidFill>
+                          <a:latin typeface="Microsoft YaHei"/>
+                          <a:ea typeface="Microsoft YaHei"/>
+                        </a:rPr>
+                        <a:t>模式</a:t>
+                      </a:r>
+                    </a:p>
+                  </a:txBody>
+                  <a:tcPr>
+                    <a:solidFill>
+                      <a:srgbClr val="0071CE"/>
+                    </a:solidFill>
+                  </a:tcPr>
+                </a:tc>
+                <a:tc>
+                  <a:txBody>
+                    <a:bodyPr/>
+                    <a:lstStyle/>
+                    <a:p>
+                      <a:r>
+                        <a:rPr sz="1050" b="1">
+                          <a:solidFill>
+                            <a:srgbClr val="FFFFFF"/>
+                          </a:solidFill>
+                          <a:latin typeface="Microsoft YaHei"/>
+                          <a:ea typeface="Microsoft YaHei"/>
+                        </a:rPr>
+                        <a:t>关键进展（置信度）</a:t>
+                      </a:r>
+                    </a:p>
+                  </a:txBody>
+                  <a:tcPr>
+                    <a:solidFill>
+                      <a:srgbClr val="0071CE"/>
+                    </a:solidFill>
+                  </a:tcPr>
+                </a:tc>
+                <a:tc>
+                  <a:txBody>
+                    <a:bodyPr/>
+                    <a:lstStyle/>
+                    <a:p>
+                      <a:r>
+                        <a:rPr sz="1050" b="1">
+                          <a:solidFill>
+                            <a:srgbClr val="FFFFFF"/>
+                          </a:solidFill>
+                          <a:latin typeface="Microsoft YaHei"/>
+                          <a:ea typeface="Microsoft YaHei"/>
+                        </a:rPr>
+                        <a:t>对沃尔玛中国的含义</a:t>
+                      </a:r>
+                    </a:p>
+                  </a:txBody>
+                  <a:tcPr>
+                    <a:solidFill>
+                      <a:srgbClr val="0071CE"/>
+                    </a:solidFill>
+                  </a:tcPr>
+                </a:tc>
+              </a:tr>
+              <a:tr h="658368">
+                <a:tc>
+                  <a:txBody>
+                    <a:bodyPr wrap="square"/>
+                    <a:lstStyle/>
+                    <a:p>
+                      <a:r>
+                        <a:rPr sz="1050" b="0">
+                          <a:solidFill>
+                            <a:srgbClr val="1F2937"/>
+                          </a:solidFill>
+                          <a:latin typeface="Microsoft YaHei"/>
+                          <a:ea typeface="Microsoft YaHei"/>
+                        </a:rPr>
+                        <a:t>字节：豆包×抖音</a:t>
+                      </a:r>
+                    </a:p>
+                  </a:txBody>
+                  <a:tcPr marT="38100" marB="38100">
+                    <a:solidFill>
+                      <a:srgbClr val="F3F6FB"/>
+                    </a:solidFill>
+                  </a:tcPr>
+                </a:tc>
+                <a:tc>
+                  <a:txBody>
+                    <a:bodyPr wrap="square"/>
+                    <a:lstStyle/>
+                    <a:p>
+                      <a:r>
+                        <a:rPr sz="1050" b="0">
+                          <a:solidFill>
+                            <a:srgbClr val="1F2937"/>
+                          </a:solidFill>
+                          <a:latin typeface="Microsoft YaHei"/>
+                          <a:ea typeface="Microsoft YaHei"/>
+                        </a:rPr>
+                        <a:t>垂直闭环</a:t>
+                      </a:r>
+                    </a:p>
+                  </a:txBody>
+                  <a:tcPr marT="38100" marB="38100">
+                    <a:solidFill>
+                      <a:srgbClr val="F3F6FB"/>
+                    </a:solidFill>
+                  </a:tcPr>
+                </a:tc>
+                <a:tc>
+                  <a:txBody>
+                    <a:bodyPr wrap="square"/>
+                    <a:lstStyle/>
+                    <a:p>
+                      <a:r>
+                        <a:rPr sz="1050" b="0">
+                          <a:solidFill>
+                            <a:srgbClr val="1F2937"/>
+                          </a:solidFill>
+                          <a:latin typeface="Microsoft YaHei"/>
+                          <a:ea typeface="Microsoft YaHei"/>
+                        </a:rPr>
+                        <a:t>3.83 亿 MAU（高）；『买前问豆包』一级入口，App 内闭环；2026-07 起订单正式归因（中）</a:t>
+                      </a:r>
+                    </a:p>
+                  </a:txBody>
+                  <a:tcPr marT="38100" marB="38100">
+                    <a:solidFill>
+                      <a:srgbClr val="F3F6FB"/>
+                    </a:solidFill>
+                  </a:tcPr>
+                </a:tc>
+                <a:tc>
+                  <a:txBody>
+                    <a:bodyPr wrap="square"/>
+                    <a:lstStyle/>
+                    <a:p>
+                      <a:r>
+                        <a:rPr sz="1050" b="0">
+                          <a:solidFill>
+                            <a:srgbClr val="1F2937"/>
+                          </a:solidFill>
+                          <a:latin typeface="Microsoft YaHei"/>
+                          <a:ea typeface="Microsoft YaHei"/>
+                        </a:rPr>
+                        <a:t>年轻家庭决策截流；『山姆平替』内容放大器</a:t>
+                      </a:r>
+                    </a:p>
+                  </a:txBody>
+                  <a:tcPr marT="38100" marB="38100">
+                    <a:solidFill>
+                      <a:srgbClr val="F3F6FB"/>
+                    </a:solidFill>
+                  </a:tcPr>
+                </a:tc>
+              </a:tr>
+              <a:tr h="658368">
+                <a:tc>
+                  <a:txBody>
+                    <a:bodyPr wrap="square"/>
+                    <a:lstStyle/>
+                    <a:p>
+                      <a:r>
+                        <a:rPr sz="1050" b="0">
+                          <a:solidFill>
+                            <a:srgbClr val="1F2937"/>
+                          </a:solidFill>
+                          <a:latin typeface="Microsoft YaHei"/>
+                          <a:ea typeface="Microsoft YaHei"/>
+                        </a:rPr>
+                        <a:t>阿里：千问×淘宝</a:t>
+                      </a:r>
+                    </a:p>
+                  </a:txBody>
+                  <a:tcPr marT="38100" marB="38100">
+                    <a:solidFill>
+                      <a:srgbClr val="FFFFFF"/>
+                    </a:solidFill>
+                  </a:tcPr>
+                </a:tc>
+                <a:tc>
+                  <a:txBody>
+                    <a:bodyPr wrap="square"/>
+                    <a:lstStyle/>
+                    <a:p>
+                      <a:r>
+                        <a:rPr sz="1050" b="0">
+                          <a:solidFill>
+                            <a:srgbClr val="1F2937"/>
+                          </a:solidFill>
+                          <a:latin typeface="Microsoft YaHei"/>
+                          <a:ea typeface="Microsoft YaHei"/>
+                        </a:rPr>
+                        <a:t>垂直闭环</a:t>
+                      </a:r>
+                    </a:p>
+                  </a:txBody>
+                  <a:tcPr marT="38100" marB="38100">
+                    <a:solidFill>
+                      <a:srgbClr val="FFFFFF"/>
+                    </a:solidFill>
+                  </a:tcPr>
+                </a:tc>
+                <a:tc>
+                  <a:txBody>
+                    <a:bodyPr wrap="square"/>
+                    <a:lstStyle/>
+                    <a:p>
+                      <a:r>
+                        <a:rPr sz="1050" b="0">
+                          <a:solidFill>
+                            <a:srgbClr val="1F2937"/>
+                          </a:solidFill>
+                          <a:latin typeface="Microsoft YaHei"/>
+                          <a:ea typeface="Microsoft YaHei"/>
+                        </a:rPr>
+                        <a:t>1.66 亿 MAU（高）；对话完成淘宝全链路；1.4 亿用户首次 AI 购物（中）</a:t>
+                      </a:r>
+                    </a:p>
+                  </a:txBody>
+                  <a:tcPr marT="38100" marB="38100">
+                    <a:solidFill>
+                      <a:srgbClr val="FFFFFF"/>
+                    </a:solidFill>
+                  </a:tcPr>
+                </a:tc>
+                <a:tc>
+                  <a:txBody>
+                    <a:bodyPr wrap="square"/>
+                    <a:lstStyle/>
+                    <a:p>
+                      <a:r>
+                        <a:rPr sz="1050" b="0">
+                          <a:solidFill>
+                            <a:srgbClr val="1F2937"/>
+                          </a:solidFill>
+                          <a:latin typeface="Microsoft YaHei"/>
+                          <a:ea typeface="Microsoft YaHei"/>
+                        </a:rPr>
+                        <a:t>盒马为其生鲜抓手，入口优先导流阿里系</a:t>
+                      </a:r>
+                    </a:p>
+                  </a:txBody>
+                  <a:tcPr marT="38100" marB="38100">
+                    <a:solidFill>
+                      <a:srgbClr val="FFFFFF"/>
+                    </a:solidFill>
+                  </a:tcPr>
+                </a:tc>
+              </a:tr>
+              <a:tr h="658368">
+                <a:tc>
+                  <a:txBody>
+                    <a:bodyPr wrap="square"/>
+                    <a:lstStyle/>
+                    <a:p>
+                      <a:r>
+                        <a:rPr sz="1050" b="0">
+                          <a:solidFill>
+                            <a:srgbClr val="1F2937"/>
+                          </a:solidFill>
+                          <a:latin typeface="Microsoft YaHei"/>
+                          <a:ea typeface="Microsoft YaHei"/>
+                        </a:rPr>
+                        <a:t>腾讯+京东：元宝×京东</a:t>
+                      </a:r>
+                    </a:p>
+                  </a:txBody>
+                  <a:tcPr marT="38100" marB="38100">
+                    <a:solidFill>
+                      <a:srgbClr val="F3F6FB"/>
+                    </a:solidFill>
+                  </a:tcPr>
+                </a:tc>
+                <a:tc>
+                  <a:txBody>
+                    <a:bodyPr wrap="square"/>
+                    <a:lstStyle/>
+                    <a:p>
+                      <a:r>
+                        <a:rPr sz="1050" b="0">
+                          <a:solidFill>
+                            <a:srgbClr val="1F2937"/>
+                          </a:solidFill>
+                          <a:latin typeface="Microsoft YaHei"/>
+                          <a:ea typeface="Microsoft YaHei"/>
+                        </a:rPr>
+                        <a:t>生态联盟</a:t>
+                      </a:r>
+                    </a:p>
+                  </a:txBody>
+                  <a:tcPr marT="38100" marB="38100">
+                    <a:solidFill>
+                      <a:srgbClr val="F3F6FB"/>
+                    </a:solidFill>
+                  </a:tcPr>
+                </a:tc>
+                <a:tc>
+                  <a:txBody>
+                    <a:bodyPr wrap="square"/>
+                    <a:lstStyle/>
+                    <a:p>
+                      <a:r>
+                        <a:rPr sz="1050" b="0">
+                          <a:solidFill>
+                            <a:srgbClr val="1F2937"/>
+                          </a:solidFill>
+                          <a:latin typeface="Microsoft YaHei"/>
+                          <a:ea typeface="Microsoft YaHei"/>
+                        </a:rPr>
+                        <a:t>2026-07 打通小程序生态：对话出商品卡→跳京东小程序成交（中）</a:t>
+                      </a:r>
+                    </a:p>
+                  </a:txBody>
+                  <a:tcPr marT="38100" marB="38100">
+                    <a:solidFill>
+                      <a:srgbClr val="F3F6FB"/>
+                    </a:solidFill>
+                  </a:tcPr>
+                </a:tc>
+                <a:tc>
+                  <a:txBody>
+                    <a:bodyPr wrap="square"/>
+                    <a:lstStyle/>
+                    <a:p>
+                      <a:r>
+                        <a:rPr sz="1050" b="0">
+                          <a:solidFill>
+                            <a:srgbClr val="1F2937"/>
+                          </a:solidFill>
+                          <a:latin typeface="Microsoft YaHei"/>
+                          <a:ea typeface="Microsoft YaHei"/>
+                        </a:rPr>
+                        <a:t>最重要样板：微信 AI 愿以小程序方式与零售方合作——山姆可复制</a:t>
+                      </a:r>
+                    </a:p>
+                  </a:txBody>
+                  <a:tcPr marT="38100" marB="38100">
+                    <a:solidFill>
+                      <a:srgbClr val="F3F6FB"/>
+                    </a:solidFill>
+                  </a:tcPr>
+                </a:tc>
+              </a:tr>
+              <a:tr h="658368">
+                <a:tc>
+                  <a:txBody>
+                    <a:bodyPr wrap="square"/>
+                    <a:lstStyle/>
+                    <a:p>
+                      <a:r>
+                        <a:rPr sz="1050" b="0">
+                          <a:solidFill>
+                            <a:srgbClr val="1F2937"/>
+                          </a:solidFill>
+                          <a:latin typeface="Microsoft YaHei"/>
+                          <a:ea typeface="Microsoft YaHei"/>
+                        </a:rPr>
+                        <a:t>京东自有 AI</a:t>
+                      </a:r>
+                    </a:p>
+                  </a:txBody>
+                  <a:tcPr marT="38100" marB="38100">
+                    <a:solidFill>
+                      <a:srgbClr val="FFFFFF"/>
+                    </a:solidFill>
+                  </a:tcPr>
+                </a:tc>
+                <a:tc>
+                  <a:txBody>
+                    <a:bodyPr wrap="square"/>
+                    <a:lstStyle/>
+                    <a:p>
+                      <a:r>
+                        <a:rPr sz="1050" b="0">
+                          <a:solidFill>
+                            <a:srgbClr val="1F2937"/>
+                          </a:solidFill>
+                          <a:latin typeface="Microsoft YaHei"/>
+                          <a:ea typeface="Microsoft YaHei"/>
+                        </a:rPr>
+                        <a:t>自建</a:t>
+                      </a:r>
+                    </a:p>
+                  </a:txBody>
+                  <a:tcPr marT="38100" marB="38100">
+                    <a:solidFill>
+                      <a:srgbClr val="FFFFFF"/>
+                    </a:solidFill>
+                  </a:tcPr>
+                </a:tc>
+                <a:tc>
+                  <a:txBody>
+                    <a:bodyPr wrap="square"/>
+                    <a:lstStyle/>
+                    <a:p>
+                      <a:r>
+                        <a:rPr sz="1050" b="0">
+                          <a:solidFill>
+                            <a:srgbClr val="B42318"/>
+                          </a:solidFill>
+                          <a:latin typeface="Microsoft YaHei"/>
+                          <a:ea typeface="Microsoft YaHei"/>
+                        </a:rPr>
+                        <a:t>京言/京东 AI 购等；自报数据（8000 万用户等）→ 低置信·不采信</a:t>
+                      </a:r>
+                    </a:p>
+                  </a:txBody>
+                  <a:tcPr marT="38100" marB="38100">
+                    <a:solidFill>
+                      <a:srgbClr val="FFFFFF"/>
+                    </a:solidFill>
+                  </a:tcPr>
+                </a:tc>
+                <a:tc>
+                  <a:txBody>
+                    <a:bodyPr wrap="square"/>
+                    <a:lstStyle/>
+                    <a:p>
+                      <a:r>
+                        <a:rPr sz="1050" b="0">
+                          <a:solidFill>
+                            <a:srgbClr val="1F2937"/>
+                          </a:solidFill>
+                          <a:latin typeface="Microsoft YaHei"/>
+                          <a:ea typeface="Microsoft YaHei"/>
+                        </a:rPr>
+                        <a:t>方向可确认、数字不采信；既是秒送渠道伙伴又是竞对</a:t>
+                      </a:r>
+                    </a:p>
+                  </a:txBody>
+                  <a:tcPr marT="38100" marB="38100">
+                    <a:solidFill>
+                      <a:srgbClr val="FFFFFF"/>
+                    </a:solidFill>
+                  </a:tcPr>
+                </a:tc>
+              </a:tr>
+              <a:tr h="658368">
+                <a:tc>
+                  <a:txBody>
+                    <a:bodyPr wrap="square"/>
+                    <a:lstStyle/>
+                    <a:p>
+                      <a:r>
+                        <a:rPr sz="1050" b="0">
+                          <a:solidFill>
+                            <a:srgbClr val="1F2937"/>
+                          </a:solidFill>
+                          <a:latin typeface="Microsoft YaHei"/>
+                          <a:ea typeface="Microsoft YaHei"/>
+                        </a:rPr>
+                        <a:t>变量：小红书点点 / 拼多多 / 快手</a:t>
+                      </a:r>
+                    </a:p>
+                  </a:txBody>
+                  <a:tcPr marT="38100" marB="38100">
+                    <a:solidFill>
+                      <a:srgbClr val="F3F6FB"/>
+                    </a:solidFill>
+                  </a:tcPr>
+                </a:tc>
+                <a:tc>
+                  <a:txBody>
+                    <a:bodyPr wrap="square"/>
+                    <a:lstStyle/>
+                    <a:p>
+                      <a:r>
+                        <a:rPr sz="1050" b="0">
+                          <a:solidFill>
+                            <a:srgbClr val="1F2937"/>
+                          </a:solidFill>
+                          <a:latin typeface="Microsoft YaHei"/>
+                          <a:ea typeface="Microsoft YaHei"/>
+                        </a:rPr>
+                        <a:t>社区 AI / 站内工具</a:t>
+                      </a:r>
+                    </a:p>
+                  </a:txBody>
+                  <a:tcPr marT="38100" marB="38100">
+                    <a:solidFill>
+                      <a:srgbClr val="F3F6FB"/>
+                    </a:solidFill>
+                  </a:tcPr>
+                </a:tc>
+                <a:tc>
+                  <a:txBody>
+                    <a:bodyPr wrap="square"/>
+                    <a:lstStyle/>
+                    <a:p>
+                      <a:r>
+                        <a:rPr sz="1050" b="0">
+                          <a:solidFill>
+                            <a:srgbClr val="1F2937"/>
+                          </a:solidFill>
+                          <a:latin typeface="Microsoft YaHei"/>
+                          <a:ea typeface="Microsoft YaHei"/>
+                        </a:rPr>
+                        <a:t>点点并入主站（中）；拼多多、快手已上线 AI 搜索，披露极少</a:t>
+                      </a:r>
+                    </a:p>
+                  </a:txBody>
+                  <a:tcPr marT="38100" marB="38100">
+                    <a:solidFill>
+                      <a:srgbClr val="F3F6FB"/>
+                    </a:solidFill>
+                  </a:tcPr>
+                </a:tc>
+                <a:tc>
+                  <a:txBody>
+                    <a:bodyPr wrap="square"/>
+                    <a:lstStyle/>
+                    <a:p>
+                      <a:r>
+                        <a:rPr sz="1050" b="0">
+                          <a:solidFill>
+                            <a:srgbClr val="1F2937"/>
+                          </a:solidFill>
+                          <a:latin typeface="Microsoft YaHei"/>
+                          <a:ea typeface="Microsoft YaHei"/>
+                        </a:rPr>
+                        <a:t>点点=山姆爆品种草与平替拆解主阵地，GEO 必须覆盖</a:t>
+                      </a:r>
+                    </a:p>
+                  </a:txBody>
+                  <a:tcPr marT="38100" marB="38100">
+                    <a:solidFill>
+                      <a:srgbClr val="F3F6FB"/>
+                    </a:solidFill>
+                  </a:tcPr>
+                </a:tc>
+              </a:tr>
+            </a:tbl>
+          </a:graphicData>
+        </a:graphic>
+      </p:graphicFrame>
       <p:sp>
         <p:nvSpPr>
           <p:cNvPr id="7" name="TextBox 6"/>
@@ -3582,7 +4151,7 @@
                 <a:latin typeface="Microsoft YaHei"/>
                 <a:ea typeface="Microsoft YaHei"/>
               </a:rPr>
-              <a:t>红=国内、蓝=海外；斜纹=低置信（自报·注水风险）。WAU/MAU/年度用户/设备数口径各异，仅作量级对照。</a:t>
+              <a:t>来源：QuestMobile（高）、各公司官宣（中）、京东发布会（低置信·降级）。</a:t>
             </a:r>
           </a:p>
         </p:txBody>
@@ -3684,7 +4253,7 @@
                 <a:latin typeface="Microsoft YaHei"/>
                 <a:ea typeface="Microsoft YaHei"/>
               </a:rPr>
-              <a:t>中国战场 3/4</a:t>
+              <a:t>中国战场 2/4</a:t>
             </a:r>
           </a:p>
         </p:txBody>
@@ -3724,7 +4293,7 @@
                 <a:latin typeface="Microsoft YaHei"/>
                 <a:ea typeface="Microsoft YaHei"/>
               </a:rPr>
-              <a:t>渗透曲线：AI 私域电商 2025 年 0.65 万亿，2030 年预计 3.37 万亿</a:t>
+              <a:t>入口体量：豆包已达 3.83 亿月活；京东自报数据以斜纹降级呈现</a:t>
             </a:r>
           </a:p>
         </p:txBody>
@@ -3764,14 +4333,14 @@
                 <a:latin typeface="Microsoft YaHei"/>
                 <a:ea typeface="Microsoft YaHei"/>
               </a:rPr>
-              <a:t>沃尔玛中国 CTO 汇报｜AI 电商行业研究（预读版 v1.0）｜数据截至 2026-07｜内部资料·注意保密｜11</a:t>
+              <a:t>沃尔玛中国 CTO 汇报｜AI 电商行业研究（预读版 v1.1）｜数据截至 2026-07｜内部资料·注意保密｜11</a:t>
             </a:r>
           </a:p>
         </p:txBody>
       </p:sp>
       <p:pic>
         <p:nvPicPr>
-          <p:cNvPr id="6" name="Picture 5" descr="05_china_ai_private_ecommerce.png"/>
+          <p:cNvPr id="6" name="Picture 5" descr="04_ai_entrance_user_scale.png"/>
           <p:cNvPicPr>
             <a:picLocks noChangeAspect="1"/>
           </p:cNvPicPr>
@@ -3785,8 +4354,8 @@
         </p:blipFill>
         <p:spPr>
           <a:xfrm>
-            <a:off x="2361162" y="1600200"/>
-            <a:ext cx="7469370" cy="4160520"/>
+            <a:off x="1622735" y="1600200"/>
+            <a:ext cx="8946224" cy="4160520"/>
           </a:xfrm>
           <a:prstGeom prst="rect">
             <a:avLst/>
@@ -3828,7 +4397,7 @@
                 <a:latin typeface="Microsoft YaHei"/>
                 <a:ea typeface="Microsoft YaHei"/>
               </a:rPr>
-              <a:t>来源：网经社（中置信）。口径仅为私域子集——中国尚无全量『AI 电商 GMV』权威口径，本研究将自建估算模型。</a:t>
+              <a:t>决策含义：站外入口体量已达电商 App 量级，『被 AI 发现』成为必选项；低置信数据不改变该判断。</a:t>
             </a:r>
           </a:p>
         </p:txBody>
@@ -3930,7 +4499,7 @@
                 <a:latin typeface="Microsoft YaHei"/>
                 <a:ea typeface="Microsoft YaHei"/>
               </a:rPr>
-              <a:t>中国战场 4/4</a:t>
+              <a:t>中国战场 3/4</a:t>
             </a:r>
           </a:p>
         </p:txBody>
@@ -3970,7 +4539,7 @@
                 <a:latin typeface="Microsoft YaHei"/>
                 <a:ea typeface="Microsoft YaHei"/>
               </a:rPr>
-              <a:t>站内 AI 导购已被证明有效：转化提升 40%~60% 是可信区间</a:t>
+              <a:t>渗透曲线：AI 私域电商 2025 年 0.65 万亿，2030 年预计 3.37 万亿</a:t>
             </a:r>
           </a:p>
         </p:txBody>
@@ -4010,14 +4579,14 @@
                 <a:latin typeface="Microsoft YaHei"/>
                 <a:ea typeface="Microsoft YaHei"/>
               </a:rPr>
-              <a:t>沃尔玛中国 CTO 汇报｜AI 电商行业研究（预读版 v1.0）｜数据截至 2026-07｜内部资料·注意保密｜12</a:t>
+              <a:t>沃尔玛中国 CTO 汇报｜AI 电商行业研究（预读版 v1.1）｜数据截至 2026-07｜内部资料·注意保密｜12</a:t>
             </a:r>
           </a:p>
         </p:txBody>
       </p:sp>
       <p:pic>
         <p:nvPicPr>
-          <p:cNvPr id="6" name="Picture 5" descr="07_instore_ai_scorecard.png"/>
+          <p:cNvPr id="6" name="Picture 5" descr="05_china_ai_private_ecommerce.png"/>
           <p:cNvPicPr>
             <a:picLocks noChangeAspect="1"/>
           </p:cNvPicPr>
@@ -4031,8 +4600,8 @@
         </p:blipFill>
         <p:spPr>
           <a:xfrm>
-            <a:off x="987143" y="1600200"/>
-            <a:ext cx="10217409" cy="4160520"/>
+            <a:off x="2361162" y="1600200"/>
+            <a:ext cx="7469370" cy="4160520"/>
           </a:xfrm>
           <a:prstGeom prst="rect">
             <a:avLst/>
@@ -4074,7 +4643,7 @@
                 <a:latin typeface="Microsoft YaHei"/>
                 <a:ea typeface="Microsoft YaHei"/>
               </a:rPr>
-              <a:t>绿=第三方/自报效果指标；斜纹=低置信（京东自报）。Rufus 约 120 亿美元增量为亚马逊自报（中置信）。</a:t>
+              <a:t>口径注意：仅为私域子集——中国尚无全量『AI 电商 GMV』权威口径，本研究 P1 阶段将自建估算模型。</a:t>
             </a:r>
           </a:p>
         </p:txBody>
@@ -4176,7 +4745,7 @@
                 <a:latin typeface="Microsoft YaHei"/>
                 <a:ea typeface="Microsoft YaHei"/>
               </a:rPr>
-              <a:t>沃尔玛中国映射 1/2</a:t>
+              <a:t>中国战场 4/4</a:t>
             </a:r>
           </a:p>
         </p:txBody>
@@ -4216,7 +4785,7 @@
                 <a:latin typeface="Microsoft YaHei"/>
                 <a:ea typeface="Microsoft YaHei"/>
               </a:rPr>
-              <a:t>山姆的七项资产决定：AI 导购的 ROI 天花板全行业最高</a:t>
+              <a:t>站内 AI 导购已被证明有效：转化提升 40%~60% 是可信区间</a:t>
             </a:r>
           </a:p>
         </p:txBody>
@@ -4256,7 +4825,253 @@
                 <a:latin typeface="Microsoft YaHei"/>
                 <a:ea typeface="Microsoft YaHei"/>
               </a:rPr>
-              <a:t>沃尔玛中国 CTO 汇报｜AI 电商行业研究（预读版 v1.0）｜数据截至 2026-07｜内部资料·注意保密｜13</a:t>
+              <a:t>沃尔玛中国 CTO 汇报｜AI 电商行业研究（预读版 v1.1）｜数据截至 2026-07｜内部资料·注意保密｜13</a:t>
+            </a:r>
+          </a:p>
+        </p:txBody>
+      </p:sp>
+      <p:pic>
+        <p:nvPicPr>
+          <p:cNvPr id="6" name="Picture 5" descr="07_instore_ai_scorecard.png"/>
+          <p:cNvPicPr>
+            <a:picLocks noChangeAspect="1"/>
+          </p:cNvPicPr>
+          <p:nvPr/>
+        </p:nvPicPr>
+        <p:blipFill>
+          <a:blip r:embed="rId2"/>
+          <a:stretch>
+            <a:fillRect/>
+          </a:stretch>
+        </p:blipFill>
+        <p:spPr>
+          <a:xfrm>
+            <a:off x="987143" y="1600200"/>
+            <a:ext cx="10217409" cy="4160520"/>
+          </a:xfrm>
+          <a:prstGeom prst="rect">
+            <a:avLst/>
+          </a:prstGeom>
+        </p:spPr>
+      </p:pic>
+      <p:sp>
+        <p:nvSpPr>
+          <p:cNvPr id="7" name="TextBox 6"/>
+          <p:cNvSpPr txBox="1"/>
+          <p:nvPr/>
+        </p:nvSpPr>
+        <p:spPr>
+          <a:xfrm>
+            <a:off x="731520" y="6053328"/>
+            <a:ext cx="10881360" cy="411480"/>
+          </a:xfrm>
+          <a:prstGeom prst="rect">
+            <a:avLst/>
+          </a:prstGeom>
+          <a:noFill/>
+        </p:spPr>
+        <p:txBody>
+          <a:bodyPr wrap="square">
+            <a:spAutoFit/>
+          </a:bodyPr>
+          <a:lstStyle/>
+          <a:p>
+            <a:pPr algn="l">
+              <a:spcAft>
+                <a:spcPts val="400"/>
+              </a:spcAft>
+            </a:pPr>
+            <a:r>
+              <a:rPr sz="950" b="0">
+                <a:solidFill>
+                  <a:srgbClr val="6B7280"/>
+                </a:solidFill>
+                <a:latin typeface="Microsoft YaHei"/>
+                <a:ea typeface="Microsoft YaHei"/>
+              </a:rPr>
+              <a:t>决策含义：可信区间取自绿色（高/中置信）指标；京东斜纹柱不参与区间判断——结论不依赖低置信数据。</a:t>
+            </a:r>
+          </a:p>
+        </p:txBody>
+      </p:sp>
+    </p:spTree>
+  </p:cSld>
+  <p:clrMapOvr>
+    <a:masterClrMapping/>
+  </p:clrMapOvr>
+</p:sld>
+</file>
+
+<file path=ppt/slides/slide14.xml><?xml version="1.0" encoding="utf-8"?>
+<p:sld xmlns:a="http://schemas.openxmlformats.org/drawingml/2006/main" xmlns:p="http://schemas.openxmlformats.org/presentationml/2006/main" xmlns:r="http://schemas.openxmlformats.org/officeDocument/2006/relationships">
+  <p:cSld>
+    <p:spTree>
+      <p:nvGrpSpPr>
+        <p:cNvPr id="1" name=""/>
+        <p:cNvGrpSpPr/>
+        <p:nvPr/>
+      </p:nvGrpSpPr>
+      <p:grpSpPr/>
+      <p:sp>
+        <p:nvSpPr>
+          <p:cNvPr id="2" name="Rectangle 1"/>
+          <p:cNvSpPr/>
+          <p:nvPr/>
+        </p:nvSpPr>
+        <p:spPr>
+          <a:xfrm>
+            <a:off x="502920" y="384048"/>
+            <a:ext cx="128016" cy="457200"/>
+          </a:xfrm>
+          <a:prstGeom prst="rect">
+            <a:avLst/>
+          </a:prstGeom>
+          <a:solidFill>
+            <a:srgbClr val="FFC220"/>
+          </a:solidFill>
+          <a:ln>
+            <a:noFill/>
+          </a:ln>
+          <a:effectLst/>
+        </p:spPr>
+        <p:style>
+          <a:lnRef idx="1">
+            <a:schemeClr val="accent1"/>
+          </a:lnRef>
+          <a:fillRef idx="3">
+            <a:schemeClr val="accent1"/>
+          </a:fillRef>
+          <a:effectRef idx="2">
+            <a:schemeClr val="accent1"/>
+          </a:effectRef>
+          <a:fontRef idx="minor">
+            <a:schemeClr val="lt1"/>
+          </a:fontRef>
+        </p:style>
+        <p:txBody>
+          <a:bodyPr rtlCol="0" anchor="ctr"/>
+          <a:lstStyle/>
+          <a:p>
+            <a:pPr algn="ctr"/>
+          </a:p>
+        </p:txBody>
+      </p:sp>
+      <p:sp>
+        <p:nvSpPr>
+          <p:cNvPr id="3" name="TextBox 2"/>
+          <p:cNvSpPr txBox="1"/>
+          <p:nvPr/>
+        </p:nvSpPr>
+        <p:spPr>
+          <a:xfrm>
+            <a:off x="749808" y="329184"/>
+            <a:ext cx="10607040" cy="365760"/>
+          </a:xfrm>
+          <a:prstGeom prst="rect">
+            <a:avLst/>
+          </a:prstGeom>
+          <a:noFill/>
+        </p:spPr>
+        <p:txBody>
+          <a:bodyPr wrap="square">
+            <a:spAutoFit/>
+          </a:bodyPr>
+          <a:lstStyle/>
+          <a:p>
+            <a:pPr algn="l">
+              <a:spcAft>
+                <a:spcPts val="419"/>
+              </a:spcAft>
+            </a:pPr>
+            <a:r>
+              <a:rPr sz="1200" b="1">
+                <a:solidFill>
+                  <a:srgbClr val="0071CE"/>
+                </a:solidFill>
+                <a:latin typeface="Microsoft YaHei"/>
+                <a:ea typeface="Microsoft YaHei"/>
+              </a:rPr>
+              <a:t>沃尔玛中国映射 1/2</a:t>
+            </a:r>
+          </a:p>
+        </p:txBody>
+      </p:sp>
+      <p:sp>
+        <p:nvSpPr>
+          <p:cNvPr id="4" name="TextBox 3"/>
+          <p:cNvSpPr txBox="1"/>
+          <p:nvPr/>
+        </p:nvSpPr>
+        <p:spPr>
+          <a:xfrm>
+            <a:off x="731520" y="658368"/>
+            <a:ext cx="10972800" cy="914400"/>
+          </a:xfrm>
+          <a:prstGeom prst="rect">
+            <a:avLst/>
+          </a:prstGeom>
+          <a:noFill/>
+        </p:spPr>
+        <p:txBody>
+          <a:bodyPr wrap="square">
+            <a:spAutoFit/>
+          </a:bodyPr>
+          <a:lstStyle/>
+          <a:p>
+            <a:pPr algn="l">
+              <a:spcAft>
+                <a:spcPts val="769"/>
+              </a:spcAft>
+            </a:pPr>
+            <a:r>
+              <a:rPr sz="2200" b="1">
+                <a:solidFill>
+                  <a:srgbClr val="1F2937"/>
+                </a:solidFill>
+                <a:latin typeface="Microsoft YaHei"/>
+                <a:ea typeface="Microsoft YaHei"/>
+              </a:rPr>
+              <a:t>山姆的七项资产决定：AI 导购的 ROI 天花板全行业最高</a:t>
+            </a:r>
+          </a:p>
+        </p:txBody>
+      </p:sp>
+      <p:sp>
+        <p:nvSpPr>
+          <p:cNvPr id="5" name="TextBox 4"/>
+          <p:cNvSpPr txBox="1"/>
+          <p:nvPr/>
+        </p:nvSpPr>
+        <p:spPr>
+          <a:xfrm>
+            <a:off x="502920" y="6473952"/>
+            <a:ext cx="11155680" cy="320040"/>
+          </a:xfrm>
+          <a:prstGeom prst="rect">
+            <a:avLst/>
+          </a:prstGeom>
+          <a:noFill/>
+        </p:spPr>
+        <p:txBody>
+          <a:bodyPr wrap="square">
+            <a:spAutoFit/>
+          </a:bodyPr>
+          <a:lstStyle/>
+          <a:p>
+            <a:pPr algn="l">
+              <a:spcAft>
+                <a:spcPts val="400"/>
+              </a:spcAft>
+            </a:pPr>
+            <a:r>
+              <a:rPr sz="850" b="0">
+                <a:solidFill>
+                  <a:srgbClr val="6B7280"/>
+                </a:solidFill>
+                <a:latin typeface="Microsoft YaHei"/>
+                <a:ea typeface="Microsoft YaHei"/>
+              </a:rPr>
+              <a:t>沃尔玛中国 CTO 汇报｜AI 电商行业研究（预读版 v1.1）｜数据截至 2026-07｜内部资料·注意保密｜14</a:t>
             </a:r>
           </a:p>
         </p:txBody>
@@ -4904,7 +5719,7 @@
 </p:sld>
 </file>
 
-<file path=ppt/slides/slide14.xml><?xml version="1.0" encoding="utf-8"?>
+<file path=ppt/slides/slide15.xml><?xml version="1.0" encoding="utf-8"?>
 <p:sld xmlns:a="http://schemas.openxmlformats.org/drawingml/2006/main" xmlns:p="http://schemas.openxmlformats.org/presentationml/2006/main" xmlns:r="http://schemas.openxmlformats.org/officeDocument/2006/relationships">
   <p:cSld>
     <p:spTree>
@@ -5033,7 +5848,7 @@
                 <a:latin typeface="Microsoft YaHei"/>
                 <a:ea typeface="Microsoft YaHei"/>
               </a:rPr>
-              <a:t>四个威胁（按紧迫度）与三个结构性机会</a:t>
+              <a:t>四个威胁（T1 附敞口测算）与三个结构性机会</a:t>
             </a:r>
           </a:p>
         </p:txBody>
@@ -5073,7 +5888,7 @@
                 <a:latin typeface="Microsoft YaHei"/>
                 <a:ea typeface="Microsoft YaHei"/>
               </a:rPr>
-              <a:t>沃尔玛中国 CTO 汇报｜AI 电商行业研究（预读版 v1.0）｜数据截至 2026-07｜内部资料·注意保密｜14</a:t>
+              <a:t>沃尔玛中国 CTO 汇报｜AI 电商行业研究（预读版 v1.1）｜数据截至 2026-07｜内部资料·注意保密｜15</a:t>
             </a:r>
           </a:p>
         </p:txBody>
@@ -5119,69 +5934,69 @@
           <a:p>
             <a:pPr algn="l">
               <a:spcAft>
-                <a:spcPts val="437"/>
-              </a:spcAft>
-            </a:pPr>
-            <a:r>
-              <a:rPr sz="1250" b="0">
+                <a:spcPts val="419"/>
+              </a:spcAft>
+            </a:pPr>
+            <a:r>
+              <a:rPr sz="1200" b="0">
                 <a:solidFill>
                   <a:srgbClr val="1F2937"/>
                 </a:solidFill>
                 <a:latin typeface="Microsoft YaHei"/>
                 <a:ea typeface="Microsoft YaHei"/>
               </a:rPr>
-              <a:t>1. 决策截流（现在进行时）：会员先问豆包/小红书『值不值、有无平替』；爆品是平替内容头号素材</a:t>
+              <a:t>T1 决策截流（现在进行时）：会员先问豆包/小红书『值不值、有无平替』。敞口测算（作者区间估算）：线上盘约 675 亿 × 购前 AI 咨询渗透 20%~40% × 流失/降级 5%~10% ⇒ 年化 GMV-at-risk 约 7~27 亿元，P2 用实测收窄</a:t>
             </a:r>
           </a:p>
           <a:p>
             <a:pPr algn="l">
               <a:spcAft>
-                <a:spcPts val="437"/>
-              </a:spcAft>
-            </a:pPr>
-            <a:r>
-              <a:rPr sz="1250" b="0">
+                <a:spcPts val="419"/>
+              </a:spcAft>
+            </a:pPr>
+            <a:r>
+              <a:rPr sz="1200" b="0">
                 <a:solidFill>
                   <a:srgbClr val="1F2937"/>
                 </a:solidFill>
                 <a:latin typeface="Microsoft YaHei"/>
                 <a:ea typeface="Microsoft YaHei"/>
               </a:rPr>
-              <a:t>2. 即时零售火力升级（1 年内）：美团小象+叮咚约 2000 前置仓 + 成熟算法，对极速达形成价格与时效双压</a:t>
+              <a:t>T2 即时零售火力升级（1 年内）：美团小象+叮咚约 2000 前置仓，价格与时效双压 → AI 侧应对=P1 以会员价值差异化；小象/叮咚 AI 动态并入 P2 监测</a:t>
             </a:r>
           </a:p>
           <a:p>
             <a:pPr algn="l">
               <a:spcAft>
-                <a:spcPts val="437"/>
-              </a:spcAft>
-            </a:pPr>
-            <a:r>
-              <a:rPr sz="1250" b="0">
+                <a:spcPts val="419"/>
+              </a:spcAft>
+            </a:pPr>
+            <a:r>
+              <a:rPr sz="1200" b="0">
                 <a:solidFill>
                   <a:srgbClr val="1F2937"/>
                 </a:solidFill>
                 <a:latin typeface="Microsoft YaHei"/>
                 <a:ea typeface="Microsoft YaHei"/>
               </a:rPr>
-              <a:t>3. 入口绑定排他（1~2 年）：微信 AI 零售位若被京东系独占，沃尔玛在最大社交流量池 AI 化失位</a:t>
+              <a:t>T3 入口绑定排他（1~2 年）：微信 AI 零售位若被京东系独占 → 对应 N1 谈判线</a:t>
             </a:r>
           </a:p>
           <a:p>
             <a:pPr algn="l">
               <a:spcAft>
-                <a:spcPts val="437"/>
-              </a:spcAft>
-            </a:pPr>
-            <a:r>
-              <a:rPr sz="1250" b="0">
+                <a:spcPts val="419"/>
+              </a:spcAft>
+            </a:pPr>
+            <a:r>
+              <a:rPr sz="1200" b="0">
                 <a:solidFill>
                   <a:srgbClr val="1F2937"/>
                 </a:solidFill>
                 <a:latin typeface="Microsoft YaHei"/>
                 <a:ea typeface="Microsoft YaHei"/>
               </a:rPr>
-              <a:t>4. 供给侧标准缺位（1~2 年）：feed 不做 LLM 就绪化，各 AI 入口可见度被动下降（海外：34% 商品页对 AI 不可见）</a:t>
+              <a:t>T4 供给侧标准缺位（1~2 年）：feed 不做 LLM 就绪化，可见度被动下降（海外：34% 商品页对 AI 不可见）→ 对应 P2</a:t>
             </a:r>
           </a:p>
         </p:txBody>
@@ -5255,7 +6070,7 @@
                 <a:latin typeface="Microsoft YaHei"/>
                 <a:ea typeface="Microsoft YaHei"/>
               </a:rPr>
-              <a:t>2. 会员复购代理（A4 级）：常购清单自动化、盯价、到货提醒——低 SKU 高复购下授权代理信任门槛最低</a:t>
+              <a:t>2. 会员复购代理（A4 级）：低 SKU 高复购下授权代理信任门槛最低。信任数据：国内 65%~70% 期待 AI 比价整理、仅 37%~48% 接受自动下单 → A4 从复购场景切入而非新品推荐</a:t>
             </a:r>
           </a:p>
           <a:p>
@@ -5312,7 +6127,7 @@
                 <a:latin typeface="Microsoft YaHei"/>
                 <a:ea typeface="Microsoft YaHei"/>
               </a:rPr>
-              <a:t>对标：Instacart Cart Assistant（膳食规划）已落地 Kroger/Sprouts；能力五级框架（A1 问答 → A5 自主代理）详见预读文档。</a:t>
+              <a:t>对标：Instacart Cart Assistant（膳食规划）已落地 Kroger/Sprouts；A1~A5 能力分级定义见第 9 页与预读文档 §1.3。</a:t>
             </a:r>
           </a:p>
         </p:txBody>
@@ -5325,7 +6140,7 @@
 </p:sld>
 </file>
 
-<file path=ppt/slides/slide15.xml><?xml version="1.0" encoding="utf-8"?>
+<file path=ppt/slides/slide16.xml><?xml version="1.0" encoding="utf-8"?>
 <p:sld xmlns:a="http://schemas.openxmlformats.org/drawingml/2006/main" xmlns:p="http://schemas.openxmlformats.org/presentationml/2006/main" xmlns:r="http://schemas.openxmlformats.org/officeDocument/2006/relationships">
   <p:cSld>
     <p:spTree>
@@ -5494,7 +6309,7 @@
                 <a:latin typeface="Microsoft YaHei"/>
                 <a:ea typeface="Microsoft YaHei"/>
               </a:rPr>
-              <a:t>沃尔玛中国 CTO 汇报｜AI 电商行业研究（预读版 v1.0）｜数据截至 2026-07｜内部资料·注意保密｜15</a:t>
+              <a:t>沃尔玛中国 CTO 汇报｜AI 电商行业研究（预读版 v1.1）｜数据截至 2026-07｜内部资料·注意保密｜16</a:t>
             </a:r>
           </a:p>
         </p:txBody>
@@ -5951,7 +6766,7 @@
 </p:sld>
 </file>
 
-<file path=ppt/slides/slide16.xml><?xml version="1.0" encoding="utf-8"?>
+<file path=ppt/slides/slide17.xml><?xml version="1.0" encoding="utf-8"?>
 <p:sld xmlns:a="http://schemas.openxmlformats.org/drawingml/2006/main" xmlns:p="http://schemas.openxmlformats.org/presentationml/2006/main" xmlns:r="http://schemas.openxmlformats.org/officeDocument/2006/relationships">
   <p:cSld>
     <p:spTree>
@@ -6120,7 +6935,7 @@
                 <a:latin typeface="Microsoft YaHei"/>
                 <a:ea typeface="Microsoft YaHei"/>
               </a:rPr>
-              <a:t>沃尔玛中国 CTO 汇报｜AI 电商行业研究（预读版 v1.0）｜数据截至 2026-07｜内部资料·注意保密｜16</a:t>
+              <a:t>沃尔玛中国 CTO 汇报｜AI 电商行业研究（预读版 v1.1）｜数据截至 2026-07｜内部资料·注意保密｜17</a:t>
             </a:r>
           </a:p>
         </p:txBody>
@@ -6327,7 +7142,7 @@
                           <a:latin typeface="Microsoft YaHei"/>
                           <a:ea typeface="Microsoft YaHei"/>
                         </a:rPr>
-                        <a:t>菜谱→购物车 / 常购清单 / 商品问答；深沪会员灰度 10%</a:t>
+                        <a:t>菜谱→购物车 / 常购清单 / 商品问答；深沪会员灰度 10%；T+0 启动备案材料</a:t>
                       </a:r>
                     </a:p>
                   </a:txBody>
@@ -6350,7 +7165,7 @@
                           <a:latin typeface="Microsoft YaHei"/>
                           <a:ea typeface="Microsoft YaHei"/>
                         </a:rPr>
-                        <a:t>周使用率 ≥15%；加购转化 ≥ 搜索基线 1.2 倍；客诉率 ≤ 人工</a:t>
+                        <a:t>周使用率 ≥15%（分母=灰度内当周活跃会员）；加购转化 ≥ 搜索基线 1.2 倍；客诉率 ≤ 人工</a:t>
                       </a:r>
                     </a:p>
                   </a:txBody>
@@ -6437,14 +7252,14 @@
                     <a:lstStyle/>
                     <a:p>
                       <a:r>
-                        <a:rPr sz="1000" b="0">
+                        <a:rPr sz="900" b="0">
                           <a:solidFill>
                             <a:srgbClr val="1F2937"/>
                           </a:solidFill>
                           <a:latin typeface="Microsoft YaHei"/>
                           <a:ea typeface="Microsoft YaHei"/>
                         </a:rPr>
-                        <a:t>500 组问题×豆包/千问/元宝/点点月测；500 SKU feed 改造 POC</a:t>
+                        <a:t>500 组问题×豆包/千问/元宝/点点月测（含小象/叮咚 AI 动态）；500 SKU feed 改造 POC（设对照组）</a:t>
                       </a:r>
                     </a:p>
                   </a:txBody>
@@ -6467,7 +7282,7 @@
                           <a:latin typeface="Microsoft YaHei"/>
                           <a:ea typeface="Microsoft YaHei"/>
                         </a:rPr>
-                        <a:t>产出基线报告与 GEO 优先级清单；改造后可见度提升可测量</a:t>
+                        <a:t>改造组被推荐率较对照组 +5pct 以上（连续两次月测同向）；T1 敞口收窄为实测</a:t>
                       </a:r>
                     </a:p>
                   </a:txBody>
@@ -6787,7 +7602,7 @@
 </p:sld>
 </file>
 
-<file path=ppt/slides/slide17.xml><?xml version="1.0" encoding="utf-8"?>
+<file path=ppt/slides/slide18.xml><?xml version="1.0" encoding="utf-8"?>
 <p:sld xmlns:a="http://schemas.openxmlformats.org/drawingml/2006/main" xmlns:p="http://schemas.openxmlformats.org/presentationml/2006/main" xmlns:r="http://schemas.openxmlformats.org/officeDocument/2006/relationships">
   <p:cSld>
     <p:spTree>
@@ -6956,7 +7771,7 @@
                 <a:latin typeface="Microsoft YaHei"/>
                 <a:ea typeface="Microsoft YaHei"/>
               </a:rPr>
-              <a:t>沃尔玛中国 CTO 汇报｜AI 电商行业研究（预读版 v1.0）｜数据截至 2026-07｜内部资料·注意保密｜17</a:t>
+              <a:t>沃尔玛中国 CTO 汇报｜AI 电商行业研究（预读版 v1.1）｜数据截至 2026-07｜内部资料·注意保密｜18</a:t>
             </a:r>
           </a:p>
         </p:txBody>
@@ -7013,7 +7828,7 @@
                 <a:latin typeface="Microsoft YaHei"/>
                 <a:ea typeface="Microsoft YaHei"/>
               </a:rPr>
-              <a:t>面向公众的 AI 导购须完成生成式 AI 服务备案/算法推荐备案——备案周期前置进项目计划</a:t>
+              <a:t>灰度是否触发备案义务=立项第一周法务定性（P1 首个里程碑）；备案材料 T+0 启动（法务+政府事务牵头，周期以数月计）；必要时灰度期提供『检索+模板』非生成式兜底模式</a:t>
             </a:r>
           </a:p>
           <a:p>
@@ -7236,7 +8051,7 @@
 </p:sld>
 </file>
 
-<file path=ppt/slides/slide18.xml><?xml version="1.0" encoding="utf-8"?>
+<file path=ppt/slides/slide19.xml><?xml version="1.0" encoding="utf-8"?>
 <p:sld xmlns:a="http://schemas.openxmlformats.org/drawingml/2006/main" xmlns:p="http://schemas.openxmlformats.org/presentationml/2006/main" xmlns:r="http://schemas.openxmlformats.org/officeDocument/2006/relationships">
   <p:cSld>
     <p:spTree>
@@ -7405,7 +8220,7 @@
                 <a:latin typeface="Microsoft YaHei"/>
                 <a:ea typeface="Microsoft YaHei"/>
               </a:rPr>
-              <a:t>沃尔玛中国 CTO 汇报｜AI 电商行业研究（预读版 v1.0）｜数据截至 2026-07｜内部资料·注意保密｜18</a:t>
+              <a:t>沃尔玛中国 CTO 汇报｜AI 电商行业研究（预读版 v1.1）｜数据截至 2026-07｜内部资料·注意保密｜19</a:t>
             </a:r>
           </a:p>
         </p:txBody>
@@ -7752,7 +8567,7 @@
                 <a:latin typeface="Microsoft YaHei"/>
                 <a:ea typeface="Microsoft YaHei"/>
               </a:rPr>
-              <a:t>沃尔玛中国 CTO 汇报｜AI 电商行业研究（预读版 v1.0）｜数据截至 2026-07｜内部资料·注意保密｜2</a:t>
+              <a:t>沃尔玛中国 CTO 汇报｜AI 电商行业研究（预读版 v1.1）｜数据截至 2026-07｜内部资料·注意保密｜2</a:t>
             </a:r>
           </a:p>
         </p:txBody>
@@ -8099,7 +8914,7 @@
                 <a:latin typeface="Microsoft YaHei"/>
                 <a:ea typeface="Microsoft YaHei"/>
               </a:rPr>
-              <a:t>沃尔玛中国 CTO 汇报｜AI 电商行业研究（预读版 v1.0）｜数据截至 2026-07｜内部资料·注意保密｜3</a:t>
+              <a:t>沃尔玛中国 CTO 汇报｜AI 电商行业研究（预读版 v1.1）｜数据截至 2026-07｜内部资料·注意保密｜3</a:t>
             </a:r>
           </a:p>
         </p:txBody>
@@ -8446,7 +9261,7 @@
                 <a:latin typeface="Microsoft YaHei"/>
                 <a:ea typeface="Microsoft YaHei"/>
               </a:rPr>
-              <a:t>沃尔玛中国 CTO 汇报｜AI 电商行业研究（预读版 v1.0）｜数据截至 2026-07｜内部资料·注意保密｜4</a:t>
+              <a:t>沃尔玛中国 CTO 汇报｜AI 电商行业研究（预读版 v1.1）｜数据截至 2026-07｜内部资料·注意保密｜4</a:t>
             </a:r>
           </a:p>
         </p:txBody>
@@ -8510,7 +9325,7 @@
                 <a:latin typeface="Microsoft YaHei"/>
                 <a:ea typeface="Microsoft YaHei"/>
               </a:rPr>
-              <a:t>来源：Adobe Digital Insights（基于美国零售网站超 1 万亿次访问，高置信），2026-04。</a:t>
+              <a:t>决策含义：AI 导流不是季节性噪音而是结构性迁移——零售业增速领先所有行业，「观望」的机会成本最高。</a:t>
             </a:r>
           </a:p>
         </p:txBody>
@@ -8692,7 +9507,7 @@
                 <a:latin typeface="Microsoft YaHei"/>
                 <a:ea typeface="Microsoft YaHei"/>
               </a:rPr>
-              <a:t>沃尔玛中国 CTO 汇报｜AI 电商行业研究（预读版 v1.0）｜数据截至 2026-07｜内部资料·注意保密｜5</a:t>
+              <a:t>沃尔玛中国 CTO 汇报｜AI 电商行业研究（预读版 v1.1）｜数据截至 2026-07｜内部资料·注意保密｜5</a:t>
             </a:r>
           </a:p>
         </p:txBody>
@@ -8756,7 +9571,7 @@
                 <a:latin typeface="Microsoft YaHei"/>
                 <a:ea typeface="Microsoft YaHei"/>
               </a:rPr>
-              <a:t>来源：Adobe（高置信）。含义：AI 流量已是最优获客渠道，且当前获取成本低于付费搜索——红利期窗口。</a:t>
+              <a:t>决策含义：AI 流量已是最优获客渠道，且当前获取成本低于付费搜索——典型的红利期窗口。</a:t>
             </a:r>
           </a:p>
         </p:txBody>
@@ -8938,7 +9753,7 @@
                 <a:latin typeface="Microsoft YaHei"/>
                 <a:ea typeface="Microsoft YaHei"/>
               </a:rPr>
-              <a:t>沃尔玛中国 CTO 汇报｜AI 电商行业研究（预读版 v1.0）｜数据截至 2026-07｜内部资料·注意保密｜6</a:t>
+              <a:t>沃尔玛中国 CTO 汇报｜AI 电商行业研究（预读版 v1.1）｜数据截至 2026-07｜内部资料·注意保密｜6</a:t>
             </a:r>
           </a:p>
         </p:txBody>
@@ -9002,7 +9817,7 @@
                 <a:latin typeface="Microsoft YaHei"/>
                 <a:ea typeface="Microsoft YaHei"/>
               </a:rPr>
-              <a:t>来源：Salesforce（15 亿+ 消费者样本，高置信）。口径提醒：『AI 影响的销售』≠『AI 内成交』。</a:t>
+              <a:t>口径提醒：『AI 影响的销售』≠『AI 内成交』，两者相差约一个数量级，本汇报严格分开使用。</a:t>
             </a:r>
           </a:p>
         </p:txBody>
@@ -9184,7 +9999,7 @@
                 <a:latin typeface="Microsoft YaHei"/>
                 <a:ea typeface="Microsoft YaHei"/>
               </a:rPr>
-              <a:t>沃尔玛中国 CTO 汇报｜AI 电商行业研究（预读版 v1.0）｜数据截至 2026-07｜内部资料·注意保密｜7</a:t>
+              <a:t>沃尔玛中国 CTO 汇报｜AI 电商行业研究（预读版 v1.1）｜数据截至 2026-07｜内部资料·注意保密｜7</a:t>
             </a:r>
           </a:p>
         </p:txBody>
@@ -9248,7 +10063,7 @@
                 <a:latin typeface="Microsoft YaHei"/>
                 <a:ea typeface="Microsoft YaHei"/>
               </a:rPr>
-              <a:t>来源：eMarketer / Morgan Stanley / Bain / McKinsey / Edgar Dunn（中置信预测）。决策含义：不必赌宽口径兑现，窄口径已足以支撑试点级投入。</a:t>
+              <a:t>决策含义：不必赌宽口径兑现，窄口径（AI 内成交）已足以支撑试点级投入；宽口径决定的是战略卡位价值。</a:t>
             </a:r>
           </a:p>
         </p:txBody>
@@ -9430,7 +10245,7 @@
                 <a:latin typeface="Microsoft YaHei"/>
                 <a:ea typeface="Microsoft YaHei"/>
               </a:rPr>
-              <a:t>沃尔玛中国 CTO 汇报｜AI 电商行业研究（预读版 v1.0）｜数据截至 2026-07｜内部资料·注意保密｜8</a:t>
+              <a:t>沃尔玛中国 CTO 汇报｜AI 电商行业研究（预读版 v1.1）｜数据截至 2026-07｜内部资料·注意保密｜8</a:t>
             </a:r>
           </a:p>
         </p:txBody>
@@ -9731,7 +10546,7 @@
                 <a:latin typeface="Microsoft YaHei"/>
                 <a:ea typeface="Microsoft YaHei"/>
               </a:rPr>
-              <a:t>中国战场 1/4</a:t>
+              <a:t>分析坐标系</a:t>
             </a:r>
           </a:p>
         </p:txBody>
@@ -9771,7 +10586,7 @@
                 <a:latin typeface="Microsoft YaHei"/>
                 <a:ea typeface="Microsoft YaHei"/>
               </a:rPr>
-              <a:t>入口格局：四大阵营已成，微信系联盟模式与沃尔玛通道天然契合</a:t>
+              <a:t>AI 购物能力五级：山姆站内做 A1→A3、站外做 A2、A4 只在复购场景灰度</a:t>
             </a:r>
           </a:p>
         </p:txBody>
@@ -9811,7 +10626,7 @@
                 <a:latin typeface="Microsoft YaHei"/>
                 <a:ea typeface="Microsoft YaHei"/>
               </a:rPr>
-              <a:t>沃尔玛中国 CTO 汇报｜AI 电商行业研究（预读版 v1.0）｜数据截至 2026-07｜内部资料·注意保密｜9</a:t>
+              <a:t>沃尔玛中国 CTO 汇报｜AI 电商行业研究（预读版 v1.1）｜数据截至 2026-07｜内部资料·注意保密｜9</a:t>
             </a:r>
           </a:p>
         </p:txBody>
@@ -9826,7 +10641,7 @@
         </p:nvGraphicFramePr>
         <p:xfrm>
           <a:off x="731520" y="1600200"/>
-          <a:ext cx="10972800" cy="3950208"/>
+          <a:ext cx="10972800" cy="3401568"/>
         </p:xfrm>
         <a:graphic>
           <a:graphicData uri="http://schemas.openxmlformats.org/drawingml/2006/table">
@@ -9835,12 +10650,12 @@
                 <a:tableStyleId>{5C22544A-7EE6-4342-B048-85BDC9FD1C3A}</a:tableStyleId>
               </a:tblPr>
               <a:tblGrid>
-                <a:gridCol w="1828800"/>
-                <a:gridCol w="1371600"/>
-                <a:gridCol w="4206240"/>
-                <a:gridCol w="3566160"/>
+                <a:gridCol w="731520"/>
+                <a:gridCol w="1645920"/>
+                <a:gridCol w="3474720"/>
+                <a:gridCol w="5120640"/>
               </a:tblGrid>
-              <a:tr h="658368">
+              <a:tr h="566928">
                 <a:tc>
                   <a:txBody>
                     <a:bodyPr/>
@@ -9854,7 +10669,7 @@
                           <a:latin typeface="Microsoft YaHei"/>
                           <a:ea typeface="Microsoft YaHei"/>
                         </a:rPr>
-                        <a:t>阵营</a:t>
+                        <a:t>级别</a:t>
                       </a:r>
                     </a:p>
                   </a:txBody>
@@ -9877,7 +10692,7 @@
                           <a:latin typeface="Microsoft YaHei"/>
                           <a:ea typeface="Microsoft YaHei"/>
                         </a:rPr>
-                        <a:t>模式</a:t>
+                        <a:t>名称</a:t>
                       </a:r>
                     </a:p>
                   </a:txBody>
@@ -9900,7 +10715,7 @@
                           <a:latin typeface="Microsoft YaHei"/>
                           <a:ea typeface="Microsoft YaHei"/>
                         </a:rPr>
-                        <a:t>关键进展（置信度）</a:t>
+                        <a:t>特征</a:t>
                       </a:r>
                     </a:p>
                   </a:txBody>
@@ -9923,7 +10738,7 @@
                           <a:latin typeface="Microsoft YaHei"/>
                           <a:ea typeface="Microsoft YaHei"/>
                         </a:rPr>
-                        <a:t>对沃尔玛中国的含义</a:t>
+                        <a:t>玩家标级（2026-07）</a:t>
                       </a:r>
                     </a:p>
                   </a:txBody>
@@ -9934,7 +10749,7 @@
                   </a:tcPr>
                 </a:tc>
               </a:tr>
-              <a:tr h="658368">
+              <a:tr h="566928">
                 <a:tc>
                   <a:txBody>
                     <a:bodyPr wrap="square"/>
@@ -9948,7 +10763,7 @@
                           <a:latin typeface="Microsoft YaHei"/>
                           <a:ea typeface="Microsoft YaHei"/>
                         </a:rPr>
-                        <a:t>字节：豆包×抖音</a:t>
+                        <a:t>A1</a:t>
                       </a:r>
                     </a:p>
                   </a:txBody>
@@ -9971,7 +10786,7 @@
                           <a:latin typeface="Microsoft YaHei"/>
                           <a:ea typeface="Microsoft YaHei"/>
                         </a:rPr>
-                        <a:t>垂直闭环</a:t>
+                        <a:t>站内问答辅助</a:t>
                       </a:r>
                     </a:p>
                   </a:txBody>
@@ -9994,7 +10809,7 @@
                           <a:latin typeface="Microsoft YaHei"/>
                           <a:ea typeface="Microsoft YaHei"/>
                         </a:rPr>
-                        <a:t>3.83 亿 MAU（高）；『买前问豆包』一级入口，App 内闭环；2026-07 起订单正式归因（中）</a:t>
+                        <a:t>答疑、比较、攻略，不改变交易流程</a:t>
                       </a:r>
                     </a:p>
                   </a:txBody>
@@ -10017,7 +10832,7 @@
                           <a:latin typeface="Microsoft YaHei"/>
                           <a:ea typeface="Microsoft YaHei"/>
                         </a:rPr>
-                        <a:t>年轻家庭决策截流；『山姆平替』内容放大器</a:t>
+                        <a:t>Rufus 早期、京言（方向性事实）、淘宝问问</a:t>
                       </a:r>
                     </a:p>
                   </a:txBody>
@@ -10028,7 +10843,7 @@
                   </a:tcPr>
                 </a:tc>
               </a:tr>
-              <a:tr h="658368">
+              <a:tr h="566928">
                 <a:tc>
                   <a:txBody>
                     <a:bodyPr wrap="square"/>
@@ -10042,7 +10857,7 @@
                           <a:latin typeface="Microsoft YaHei"/>
                           <a:ea typeface="Microsoft YaHei"/>
                         </a:rPr>
-                        <a:t>阿里：千问×淘宝</a:t>
+                        <a:t>A2</a:t>
                       </a:r>
                     </a:p>
                   </a:txBody>
@@ -10065,7 +10880,7 @@
                           <a:latin typeface="Microsoft YaHei"/>
                           <a:ea typeface="Microsoft YaHei"/>
                         </a:rPr>
-                        <a:t>垂直闭环</a:t>
+                        <a:t>站外种草导流</a:t>
                       </a:r>
                     </a:p>
                   </a:txBody>
@@ -10088,7 +10903,7 @@
                           <a:latin typeface="Microsoft YaHei"/>
                           <a:ea typeface="Microsoft YaHei"/>
                         </a:rPr>
-                        <a:t>1.66 亿 MAU（高）；对话完成淘宝全链路；1.4 亿用户首次 AI 购物（中）</a:t>
+                        <a:t>AI 给推荐 + 跳转链接，交易在别处</a:t>
                       </a:r>
                     </a:p>
                   </a:txBody>
@@ -10111,7 +10926,7 @@
                           <a:latin typeface="Microsoft YaHei"/>
                           <a:ea typeface="Microsoft YaHei"/>
                         </a:rPr>
-                        <a:t>盒马为其生鲜抓手，入口优先导流阿里系</a:t>
+                        <a:t>元宝×京东（商品卡→小程序）、Sparky-in-ChatGPT（插件→自有结账）、小红书点点</a:t>
                       </a:r>
                     </a:p>
                   </a:txBody>
@@ -10122,7 +10937,7 @@
                   </a:tcPr>
                 </a:tc>
               </a:tr>
-              <a:tr h="658368">
+              <a:tr h="566928">
                 <a:tc>
                   <a:txBody>
                     <a:bodyPr wrap="square"/>
@@ -10136,7 +10951,7 @@
                           <a:latin typeface="Microsoft YaHei"/>
                           <a:ea typeface="Microsoft YaHei"/>
                         </a:rPr>
-                        <a:t>腾讯+京东：元宝×京东</a:t>
+                        <a:t>A3</a:t>
                       </a:r>
                     </a:p>
                   </a:txBody>
@@ -10159,7 +10974,7 @@
                           <a:latin typeface="Microsoft YaHei"/>
                           <a:ea typeface="Microsoft YaHei"/>
                         </a:rPr>
-                        <a:t>生态联盟</a:t>
+                        <a:t>对话内闭环</a:t>
                       </a:r>
                     </a:p>
                   </a:txBody>
@@ -10182,7 +10997,7 @@
                           <a:latin typeface="Microsoft YaHei"/>
                           <a:ea typeface="Microsoft YaHei"/>
                         </a:rPr>
-                        <a:t>2026-07 打通小程序生态：对话出商品卡→跳京东小程序成交（中）</a:t>
+                        <a:t>选品、下单、支付不出对话界面</a:t>
                       </a:r>
                     </a:p>
                   </a:txBody>
@@ -10205,7 +11020,7 @@
                           <a:latin typeface="Microsoft YaHei"/>
                           <a:ea typeface="Microsoft YaHei"/>
                         </a:rPr>
-                        <a:t>最重要样板：微信 AI 愿以小程序方式与零售方合作——山姆可复制</a:t>
+                        <a:t>豆包×抖音电商、千问×淘宝；Buy it in ChatGPT（已收缩，反例）</a:t>
                       </a:r>
                     </a:p>
                   </a:txBody>
@@ -10216,7 +11031,7 @@
                   </a:tcPr>
                 </a:tc>
               </a:tr>
-              <a:tr h="658368">
+              <a:tr h="566928">
                 <a:tc>
                   <a:txBody>
                     <a:bodyPr wrap="square"/>
@@ -10230,7 +11045,7 @@
                           <a:latin typeface="Microsoft YaHei"/>
                           <a:ea typeface="Microsoft YaHei"/>
                         </a:rPr>
-                        <a:t>京东自有 AI</a:t>
+                        <a:t>A4</a:t>
                       </a:r>
                     </a:p>
                   </a:txBody>
@@ -10253,30 +11068,7 @@
                           <a:latin typeface="Microsoft YaHei"/>
                           <a:ea typeface="Microsoft YaHei"/>
                         </a:rPr>
-                        <a:t>自建</a:t>
-                      </a:r>
-                    </a:p>
-                  </a:txBody>
-                  <a:tcPr marT="38100" marB="38100">
-                    <a:solidFill>
-                      <a:srgbClr val="FFFFFF"/>
-                    </a:solidFill>
-                  </a:tcPr>
-                </a:tc>
-                <a:tc>
-                  <a:txBody>
-                    <a:bodyPr wrap="square"/>
-                    <a:lstStyle/>
-                    <a:p>
-                      <a:r>
-                        <a:rPr sz="1050" b="0">
-                          <a:solidFill>
-                            <a:srgbClr val="B42318"/>
-                          </a:solidFill>
-                          <a:latin typeface="Microsoft YaHei"/>
-                          <a:ea typeface="Microsoft YaHei"/>
-                        </a:rPr>
-                        <a:t>京言/京东 AI 购等；自报数据（8000 万用户等）→ 低置信·不采信</a:t>
+                        <a:t>授权代理执行</a:t>
                       </a:r>
                     </a:p>
                   </a:txBody>
@@ -10299,7 +11091,7 @@
                           <a:latin typeface="Microsoft YaHei"/>
                           <a:ea typeface="Microsoft YaHei"/>
                         </a:rPr>
-                        <a:t>方向可确认、数字不采信；既是秒送渠道伙伴又是竞对</a:t>
+                        <a:t>凑单用券、盯价代拍、自动补货</a:t>
                       </a:r>
                     </a:p>
                   </a:txBody>
@@ -10309,8 +11101,6 @@
                     </a:solidFill>
                   </a:tcPr>
                 </a:tc>
-              </a:tr>
-              <a:tr h="658368">
                 <a:tc>
                   <a:txBody>
                     <a:bodyPr wrap="square"/>
@@ -10324,7 +11114,32 @@
                           <a:latin typeface="Microsoft YaHei"/>
                           <a:ea typeface="Microsoft YaHei"/>
                         </a:rPr>
-                        <a:t>变量：小红书点点 / 拼多多 / 快手</a:t>
+                        <a:t>Rufus（Buy for Me/自动购买）、淘宝 AI 帮抢——信任与风控是升级卡点</a:t>
+                      </a:r>
+                    </a:p>
+                  </a:txBody>
+                  <a:tcPr marT="38100" marB="38100">
+                    <a:solidFill>
+                      <a:srgbClr val="FFFFFF"/>
+                    </a:solidFill>
+                  </a:tcPr>
+                </a:tc>
+              </a:tr>
+              <a:tr h="566928">
+                <a:tc>
+                  <a:txBody>
+                    <a:bodyPr wrap="square"/>
+                    <a:lstStyle/>
+                    <a:p>
+                      <a:r>
+                        <a:rPr sz="1050" b="0">
+                          <a:solidFill>
+                            <a:srgbClr val="1F2937"/>
+                          </a:solidFill>
+                          <a:latin typeface="Microsoft YaHei"/>
+                          <a:ea typeface="Microsoft YaHei"/>
+                        </a:rPr>
+                        <a:t>A5</a:t>
                       </a:r>
                     </a:p>
                   </a:txBody>
@@ -10347,7 +11162,7 @@
                           <a:latin typeface="Microsoft YaHei"/>
                           <a:ea typeface="Microsoft YaHei"/>
                         </a:rPr>
-                        <a:t>社区 AI / 站内工具</a:t>
+                        <a:t>自主代理</a:t>
                       </a:r>
                     </a:p>
                   </a:txBody>
@@ -10370,7 +11185,7 @@
                           <a:latin typeface="Microsoft YaHei"/>
                           <a:ea typeface="Microsoft YaHei"/>
                         </a:rPr>
-                        <a:t>点点并入主站（中）；拼多多、快手已上线 AI 搜索，披露极少</a:t>
+                        <a:t>长期授权、全网比价代买</a:t>
                       </a:r>
                     </a:p>
                   </a:txBody>
@@ -10393,7 +11208,7 @@
                           <a:latin typeface="Microsoft YaHei"/>
                           <a:ea typeface="Microsoft YaHei"/>
                         </a:rPr>
-                        <a:t>点点=山姆爆品种草与平替拆解主阵地，GEO 必须覆盖</a:t>
+                        <a:t>尚无规模化案例（美国仅 14% 消费者信任全自动结账）</a:t>
                       </a:r>
                     </a:p>
                   </a:txBody>
@@ -10443,7 +11258,7 @@
                 <a:latin typeface="Microsoft YaHei"/>
                 <a:ea typeface="Microsoft YaHei"/>
               </a:rPr>
-              <a:t>来源：QuestMobile（高）、各公司官宣（中）、京东发布会（低置信·降级）。</a:t>
+              <a:t>本研究自建框架，后文『A2/A4 级』均指此坐标系；预读文档 §1.3 有同款定义表。</a:t>
             </a:r>
           </a:p>
         </p:txBody>

--- a/report/AI电商行业研究_沃尔玛中国CTO汇报.pptx
+++ b/report/AI电商行业研究_沃尔玛中国CTO汇报.pptx
@@ -3303,7 +3303,7 @@
                 <a:latin typeface="Microsoft YaHei"/>
                 <a:ea typeface="Microsoft YaHei"/>
               </a:rPr>
-              <a:t>版本：预读版 v1.1 ｜ 数据截至 2026-07 ｜ 配套预读文档 30 分钟</a:t>
+              <a:t>版本：预读版 v1.2 ｜ 数据截至 2026-07 ｜ 配套预读文档 30 分钟</a:t>
             </a:r>
           </a:p>
           <a:p>
@@ -3519,7 +3519,7 @@
                 <a:latin typeface="Microsoft YaHei"/>
                 <a:ea typeface="Microsoft YaHei"/>
               </a:rPr>
-              <a:t>沃尔玛中国 CTO 汇报｜AI 电商行业研究（预读版 v1.1）｜数据截至 2026-07｜内部资料·注意保密｜10</a:t>
+              <a:t>沃尔玛中国 CTO 汇报｜AI 电商行业研究（预读版 v1.2）｜数据截至 2026-07｜内部资料·注意保密｜10</a:t>
             </a:r>
           </a:p>
         </p:txBody>
@@ -4333,7 +4333,7 @@
                 <a:latin typeface="Microsoft YaHei"/>
                 <a:ea typeface="Microsoft YaHei"/>
               </a:rPr>
-              <a:t>沃尔玛中国 CTO 汇报｜AI 电商行业研究（预读版 v1.1）｜数据截至 2026-07｜内部资料·注意保密｜11</a:t>
+              <a:t>沃尔玛中国 CTO 汇报｜AI 电商行业研究（预读版 v1.2）｜数据截至 2026-07｜内部资料·注意保密｜11</a:t>
             </a:r>
           </a:p>
         </p:txBody>
@@ -4579,7 +4579,7 @@
                 <a:latin typeface="Microsoft YaHei"/>
                 <a:ea typeface="Microsoft YaHei"/>
               </a:rPr>
-              <a:t>沃尔玛中国 CTO 汇报｜AI 电商行业研究（预读版 v1.1）｜数据截至 2026-07｜内部资料·注意保密｜12</a:t>
+              <a:t>沃尔玛中国 CTO 汇报｜AI 电商行业研究（预读版 v1.2）｜数据截至 2026-07｜内部资料·注意保密｜12</a:t>
             </a:r>
           </a:p>
         </p:txBody>
@@ -4785,7 +4785,7 @@
                 <a:latin typeface="Microsoft YaHei"/>
                 <a:ea typeface="Microsoft YaHei"/>
               </a:rPr>
-              <a:t>站内 AI 导购已被证明有效：转化提升 40%~60% 是可信区间</a:t>
+              <a:t>两条证据线都为正：站内导购 +59%~60%；站外 AI 引荐转化优势 +42%~54%</a:t>
             </a:r>
           </a:p>
         </p:txBody>
@@ -4825,7 +4825,7 @@
                 <a:latin typeface="Microsoft YaHei"/>
                 <a:ea typeface="Microsoft YaHei"/>
               </a:rPr>
-              <a:t>沃尔玛中国 CTO 汇报｜AI 电商行业研究（预读版 v1.1）｜数据截至 2026-07｜内部资料·注意保密｜13</a:t>
+              <a:t>沃尔玛中国 CTO 汇报｜AI 电商行业研究（预读版 v1.2）｜数据截至 2026-07｜内部资料·注意保密｜13</a:t>
             </a:r>
           </a:p>
         </p:txBody>
@@ -4846,8 +4846,8 @@
         </p:blipFill>
         <p:spPr>
           <a:xfrm>
-            <a:off x="987143" y="1600200"/>
-            <a:ext cx="10217409" cy="4160520"/>
+            <a:off x="741583" y="1600200"/>
+            <a:ext cx="10708529" cy="4114800"/>
           </a:xfrm>
           <a:prstGeom prst="rect">
             <a:avLst/>
@@ -4889,7 +4889,7 @@
                 <a:latin typeface="Microsoft YaHei"/>
                 <a:ea typeface="Microsoft YaHei"/>
               </a:rPr>
-              <a:t>决策含义：可信区间取自绿色（高/中置信）指标；京东斜纹柱不参与区间判断——结论不依赖低置信数据。</a:t>
+              <a:t>决策含义：站内导购与站外引荐口径不同、分开呈现（不合并为单一区间）；京东斜纹柱不参与判断——结论不依赖低置信数据。</a:t>
             </a:r>
           </a:p>
         </p:txBody>
@@ -5071,7 +5071,7 @@
                 <a:latin typeface="Microsoft YaHei"/>
                 <a:ea typeface="Microsoft YaHei"/>
               </a:rPr>
-              <a:t>沃尔玛中国 CTO 汇报｜AI 电商行业研究（预读版 v1.1）｜数据截至 2026-07｜内部资料·注意保密｜14</a:t>
+              <a:t>沃尔玛中国 CTO 汇报｜AI 电商行业研究（预读版 v1.2）｜数据截至 2026-07｜内部资料·注意保密｜14</a:t>
             </a:r>
           </a:p>
         </p:txBody>
@@ -5888,7 +5888,7 @@
                 <a:latin typeface="Microsoft YaHei"/>
                 <a:ea typeface="Microsoft YaHei"/>
               </a:rPr>
-              <a:t>沃尔玛中国 CTO 汇报｜AI 电商行业研究（预读版 v1.1）｜数据截至 2026-07｜内部资料·注意保密｜15</a:t>
+              <a:t>沃尔玛中国 CTO 汇报｜AI 电商行业研究（预读版 v1.2）｜数据截至 2026-07｜内部资料·注意保密｜15</a:t>
             </a:r>
           </a:p>
         </p:txBody>
@@ -5996,7 +5996,7 @@
                 <a:latin typeface="Microsoft YaHei"/>
                 <a:ea typeface="Microsoft YaHei"/>
               </a:rPr>
-              <a:t>T4 供给侧标准缺位（1~2 年）：feed 不做 LLM 就绪化，可见度被动下降（海外：34% 商品页对 AI 不可见）→ 对应 P2</a:t>
+              <a:t>T4 供给侧标准缺位（1~2 年）：feed 不做 LLM 就绪化，可见度被动下降（34% 商品页对 AI 不可见，Adobe·高置信）→ 对应 P2</a:t>
             </a:r>
           </a:p>
         </p:txBody>
@@ -6127,7 +6127,7 @@
                 <a:latin typeface="Microsoft YaHei"/>
                 <a:ea typeface="Microsoft YaHei"/>
               </a:rPr>
-              <a:t>对标：Instacart Cart Assistant（膳食规划）已落地 Kroger/Sprouts；A1~A5 能力分级定义见第 9 页与预读文档 §1.3。</a:t>
+              <a:t>对标：Instacart Cart Assistant 已落地 Kroger/Sprouts；A1~A5 定义见第 9 页。大卖场/社区店按『同栈移植』跟随策略推进（预读 §3.4），拼多多/美团闪购动态并入 P2 监测。</a:t>
             </a:r>
           </a:p>
         </p:txBody>
@@ -6309,7 +6309,7 @@
                 <a:latin typeface="Microsoft YaHei"/>
                 <a:ea typeface="Microsoft YaHei"/>
               </a:rPr>
-              <a:t>沃尔玛中国 CTO 汇报｜AI 电商行业研究（预读版 v1.1）｜数据截至 2026-07｜内部资料·注意保密｜16</a:t>
+              <a:t>沃尔玛中国 CTO 汇报｜AI 电商行业研究（预读版 v1.2）｜数据截至 2026-07｜内部资料·注意保密｜16</a:t>
             </a:r>
           </a:p>
         </p:txBody>
@@ -6935,7 +6935,7 @@
                 <a:latin typeface="Microsoft YaHei"/>
                 <a:ea typeface="Microsoft YaHei"/>
               </a:rPr>
-              <a:t>沃尔玛中国 CTO 汇报｜AI 电商行业研究（预读版 v1.1）｜数据截至 2026-07｜内部资料·注意保密｜17</a:t>
+              <a:t>沃尔玛中国 CTO 汇报｜AI 电商行业研究（预读版 v1.2）｜数据截至 2026-07｜内部资料·注意保密｜17</a:t>
             </a:r>
           </a:p>
         </p:txBody>
@@ -7259,7 +7259,7 @@
                           <a:latin typeface="Microsoft YaHei"/>
                           <a:ea typeface="Microsoft YaHei"/>
                         </a:rPr>
-                        <a:t>500 组问题×豆包/千问/元宝/点点月测（含小象/叮咚 AI 动态）；500 SKU feed 改造 POC（设对照组）</a:t>
+                        <a:t>500 组问题×豆包/千问/元宝/点点月测（含小象/叮咚/拼多多/美团闪购 AI 动态）；500 SKU feed 改造 POC（设对照组）</a:t>
                       </a:r>
                     </a:p>
                   </a:txBody>
@@ -7589,7 +7589,7 @@
                 <a:latin typeface="Microsoft YaHei"/>
                 <a:ea typeface="Microsoft YaHei"/>
               </a:rPr>
-              <a:t>资源诉求（CTO 决策）：8~12 人虚拟团队；国内合规模型栈选型（混元/DeepSeek/通义，判据=中文商品理解、推理成本、合规就绪）；第三方数据预算约百万元级/年。</a:t>
+              <a:t>资源诉求（CTO 决策）：8~12 人虚拟团队（90 天约 24~36 人月）；国内合规模型栈选型（混元/DeepSeek/通义）；第三方数据约百万元级/年；首期 90 天总预算量级=数百万元级人民币（立项讨论用估算，财务核价出准数）。</a:t>
             </a:r>
           </a:p>
         </p:txBody>
@@ -7771,7 +7771,7 @@
                 <a:latin typeface="Microsoft YaHei"/>
                 <a:ea typeface="Microsoft YaHei"/>
               </a:rPr>
-              <a:t>沃尔玛中国 CTO 汇报｜AI 电商行业研究（预读版 v1.1）｜数据截至 2026-07｜内部资料·注意保密｜18</a:t>
+              <a:t>沃尔玛中国 CTO 汇报｜AI 电商行业研究（预读版 v1.2）｜数据截至 2026-07｜内部资料·注意保密｜18</a:t>
             </a:r>
           </a:p>
         </p:txBody>
@@ -7800,11 +7800,11 @@
           <a:p>
             <a:pPr algn="l">
               <a:spcAft>
-                <a:spcPts val="455"/>
-              </a:spcAft>
-            </a:pPr>
-            <a:r>
-              <a:rPr sz="1300" b="1">
+                <a:spcPts val="437"/>
+              </a:spcAft>
+            </a:pPr>
+            <a:r>
+              <a:rPr sz="1250" b="1">
                 <a:solidFill>
                   <a:srgbClr val="1F2937"/>
                 </a:solidFill>
@@ -7817,45 +7817,79 @@
           <a:p>
             <a:pPr algn="l" lvl="1">
               <a:spcAft>
-                <a:spcPts val="402"/>
-              </a:spcAft>
-            </a:pPr>
-            <a:r>
-              <a:rPr sz="1150" b="0">
+                <a:spcPts val="400"/>
+              </a:spcAft>
+            </a:pPr>
+            <a:r>
+              <a:rPr sz="1100" b="0">
                 <a:solidFill>
                   <a:srgbClr val="1F2937"/>
                 </a:solidFill>
                 <a:latin typeface="Microsoft YaHei"/>
                 <a:ea typeface="Microsoft YaHei"/>
               </a:rPr>
-              <a:t>灰度是否触发备案义务=立项第一周法务定性（P1 首个里程碑）；备案材料 T+0 启动（法务+政府事务牵头，周期以数月计）；必要时灰度期提供『检索+模板』非生成式兜底模式</a:t>
+              <a:t>依据《生成式人工智能服务管理暂行办法》《互联网信息服务算法推荐管理规定》：灰度是否触发备案义务=立项第一周法务定性（P1 首个里程碑）；备案材料 T+0 启动（周期以数月计）；必要时灰度期提供『检索+模板』非生成式兜底</a:t>
             </a:r>
           </a:p>
           <a:p>
             <a:pPr algn="l">
               <a:spcAft>
-                <a:spcPts val="455"/>
-              </a:spcAft>
-            </a:pPr>
-            <a:r>
-              <a:rPr sz="1300" b="1">
+                <a:spcPts val="437"/>
+              </a:spcAft>
+            </a:pPr>
+            <a:r>
+              <a:rPr sz="1250" b="1">
                 <a:solidFill>
                   <a:srgbClr val="1F2937"/>
                 </a:solidFill>
                 <a:latin typeface="Microsoft YaHei"/>
                 <a:ea typeface="Microsoft YaHei"/>
               </a:rPr>
+              <a:t>◆ AI 内容标识与个人信息合规</a:t>
+            </a:r>
+          </a:p>
+          <a:p>
+            <a:pPr algn="l" lvl="1">
+              <a:spcAft>
+                <a:spcPts val="400"/>
+              </a:spcAft>
+            </a:pPr>
+            <a:r>
+              <a:rPr sz="1100" b="0">
+                <a:solidFill>
+                  <a:srgbClr val="1F2937"/>
+                </a:solidFill>
+                <a:latin typeface="Microsoft YaHei"/>
+                <a:ea typeface="Microsoft YaHei"/>
+              </a:rPr>
+              <a:t>按《人工智能生成合成内容标识办法》添加标识；会员数据用于推理/个性化须完成个保法告知同意与 PIA；出境场景触发安全评估</a:t>
+            </a:r>
+          </a:p>
+          <a:p>
+            <a:pPr algn="l">
+              <a:spcAft>
+                <a:spcPts val="437"/>
+              </a:spcAft>
+            </a:pPr>
+            <a:r>
+              <a:rPr sz="1250" b="1">
+                <a:solidFill>
+                  <a:srgbClr val="1F2937"/>
+                </a:solidFill>
+                <a:latin typeface="Microsoft YaHei"/>
+                <a:ea typeface="Microsoft YaHei"/>
+              </a:rPr>
               <a:t>◆ 数据出境与模型选型</a:t>
             </a:r>
           </a:p>
           <a:p>
             <a:pPr algn="l" lvl="1">
               <a:spcAft>
-                <a:spcPts val="402"/>
-              </a:spcAft>
-            </a:pPr>
-            <a:r>
-              <a:rPr sz="1150" b="0">
+                <a:spcPts val="400"/>
+              </a:spcAft>
+            </a:pPr>
+            <a:r>
+              <a:rPr sz="1100" b="0">
                 <a:solidFill>
                   <a:srgbClr val="1F2937"/>
                 </a:solidFill>
@@ -7868,11 +7902,11 @@
           <a:p>
             <a:pPr algn="l">
               <a:spcAft>
-                <a:spcPts val="455"/>
-              </a:spcAft>
-            </a:pPr>
-            <a:r>
-              <a:rPr sz="1300" b="1">
+                <a:spcPts val="437"/>
+              </a:spcAft>
+            </a:pPr>
+            <a:r>
+              <a:rPr sz="1250" b="1">
                 <a:solidFill>
                   <a:srgbClr val="1F2937"/>
                 </a:solidFill>
@@ -7885,11 +7919,11 @@
           <a:p>
             <a:pPr algn="l" lvl="1">
               <a:spcAft>
-                <a:spcPts val="402"/>
-              </a:spcAft>
-            </a:pPr>
-            <a:r>
-              <a:rPr sz="1150" b="0">
+                <a:spcPts val="400"/>
+              </a:spcAft>
+            </a:pPr>
+            <a:r>
+              <a:rPr sz="1100" b="0">
                 <a:solidFill>
                   <a:srgbClr val="1F2937"/>
                 </a:solidFill>
@@ -7902,96 +7936,62 @@
           <a:p>
             <a:pPr algn="l">
               <a:spcAft>
-                <a:spcPts val="455"/>
-              </a:spcAft>
-            </a:pPr>
-            <a:r>
-              <a:rPr sz="1300" b="1">
+                <a:spcPts val="437"/>
+              </a:spcAft>
+            </a:pPr>
+            <a:r>
+              <a:rPr sz="1250" b="1">
                 <a:solidFill>
                   <a:srgbClr val="1F2937"/>
                 </a:solidFill>
                 <a:latin typeface="Microsoft YaHei"/>
                 <a:ea typeface="Microsoft YaHei"/>
               </a:rPr>
-              <a:t>◆ 未成年人与代扣授权</a:t>
+              <a:t>◆ 未成年人与代扣授权 / 比价表述</a:t>
             </a:r>
           </a:p>
           <a:p>
             <a:pPr algn="l" lvl="1">
               <a:spcAft>
-                <a:spcPts val="402"/>
-              </a:spcAft>
-            </a:pPr>
-            <a:r>
-              <a:rPr sz="1150" b="0">
+                <a:spcPts val="400"/>
+              </a:spcAft>
+            </a:pPr>
+            <a:r>
+              <a:rPr sz="1100" b="0">
                 <a:solidFill>
                   <a:srgbClr val="1F2937"/>
                 </a:solidFill>
                 <a:latin typeface="Microsoft YaHei"/>
                 <a:ea typeface="Microsoft YaHei"/>
               </a:rPr>
-              <a:t>A4 级自动购买默认关闭，会员主动开启 + 额度管控（豆包不做全自动下单的原因即在此）</a:t>
+              <a:t>A4 级自动购买默认关闭、会员主动开启+额度管控；只承诺『山姆内最优方案』，不做全网比价话术</a:t>
             </a:r>
           </a:p>
           <a:p>
             <a:pPr algn="l">
               <a:spcAft>
-                <a:spcPts val="455"/>
-              </a:spcAft>
-            </a:pPr>
-            <a:r>
-              <a:rPr sz="1300" b="1">
+                <a:spcPts val="437"/>
+              </a:spcAft>
+            </a:pPr>
+            <a:r>
+              <a:rPr sz="1250" b="1">
                 <a:solidFill>
                   <a:srgbClr val="1F2937"/>
                 </a:solidFill>
                 <a:latin typeface="Microsoft YaHei"/>
                 <a:ea typeface="Microsoft YaHei"/>
               </a:rPr>
-              <a:t>◆ 比价与价格表述</a:t>
+              <a:t>◆ 竞争情报误判</a:t>
             </a:r>
           </a:p>
           <a:p>
             <a:pPr algn="l" lvl="1">
               <a:spcAft>
-                <a:spcPts val="402"/>
-              </a:spcAft>
-            </a:pPr>
-            <a:r>
-              <a:rPr sz="1150" b="0">
-                <a:solidFill>
-                  <a:srgbClr val="1F2937"/>
-                </a:solidFill>
-                <a:latin typeface="Microsoft YaHei"/>
-                <a:ea typeface="Microsoft YaHei"/>
-              </a:rPr>
-              <a:t>只承诺『山姆内最优方案』，不做全网比价话术——规避价格法与反不正当竞争风险</a:t>
-            </a:r>
-          </a:p>
-          <a:p>
-            <a:pPr algn="l">
-              <a:spcAft>
-                <a:spcPts val="455"/>
-              </a:spcAft>
-            </a:pPr>
-            <a:r>
-              <a:rPr sz="1300" b="1">
-                <a:solidFill>
-                  <a:srgbClr val="1F2937"/>
-                </a:solidFill>
-                <a:latin typeface="Microsoft YaHei"/>
-                <a:ea typeface="Microsoft YaHei"/>
-              </a:rPr>
-              <a:t>◆ 竞争情报误判</a:t>
-            </a:r>
-          </a:p>
-          <a:p>
-            <a:pPr algn="l" lvl="1">
-              <a:spcAft>
-                <a:spcPts val="402"/>
-              </a:spcAft>
-            </a:pPr>
-            <a:r>
-              <a:rPr sz="1150" b="0">
+                <a:spcPts val="400"/>
+              </a:spcAft>
+            </a:pPr>
+            <a:r>
+              <a:rPr sz="1100" b="0">
                 <a:solidFill>
                   <a:srgbClr val="1F2937"/>
                 </a:solidFill>
@@ -8220,7 +8220,7 @@
                 <a:latin typeface="Microsoft YaHei"/>
                 <a:ea typeface="Microsoft YaHei"/>
               </a:rPr>
-              <a:t>沃尔玛中国 CTO 汇报｜AI 电商行业研究（预读版 v1.1）｜数据截至 2026-07｜内部资料·注意保密｜19</a:t>
+              <a:t>沃尔玛中国 CTO 汇报｜AI 电商行业研究（预读版 v1.2）｜数据截至 2026-07｜内部资料·注意保密｜19</a:t>
             </a:r>
           </a:p>
         </p:txBody>
@@ -8567,7 +8567,7 @@
                 <a:latin typeface="Microsoft YaHei"/>
                 <a:ea typeface="Microsoft YaHei"/>
               </a:rPr>
-              <a:t>沃尔玛中国 CTO 汇报｜AI 电商行业研究（预读版 v1.1）｜数据截至 2026-07｜内部资料·注意保密｜2</a:t>
+              <a:t>沃尔玛中国 CTO 汇报｜AI 电商行业研究（预读版 v1.2）｜数据截至 2026-07｜内部资料·注意保密｜2</a:t>
             </a:r>
           </a:p>
         </p:txBody>
@@ -8914,7 +8914,7 @@
                 <a:latin typeface="Microsoft YaHei"/>
                 <a:ea typeface="Microsoft YaHei"/>
               </a:rPr>
-              <a:t>沃尔玛中国 CTO 汇报｜AI 电商行业研究（预读版 v1.1）｜数据截至 2026-07｜内部资料·注意保密｜3</a:t>
+              <a:t>沃尔玛中国 CTO 汇报｜AI 电商行业研究（预读版 v1.2）｜数据截至 2026-07｜内部资料·注意保密｜3</a:t>
             </a:r>
           </a:p>
         </p:txBody>
@@ -9261,7 +9261,7 @@
                 <a:latin typeface="Microsoft YaHei"/>
                 <a:ea typeface="Microsoft YaHei"/>
               </a:rPr>
-              <a:t>沃尔玛中国 CTO 汇报｜AI 电商行业研究（预读版 v1.1）｜数据截至 2026-07｜内部资料·注意保密｜4</a:t>
+              <a:t>沃尔玛中国 CTO 汇报｜AI 电商行业研究（预读版 v1.2）｜数据截至 2026-07｜内部资料·注意保密｜4</a:t>
             </a:r>
           </a:p>
         </p:txBody>
@@ -9507,7 +9507,7 @@
                 <a:latin typeface="Microsoft YaHei"/>
                 <a:ea typeface="Microsoft YaHei"/>
               </a:rPr>
-              <a:t>沃尔玛中国 CTO 汇报｜AI 电商行业研究（预读版 v1.1）｜数据截至 2026-07｜内部资料·注意保密｜5</a:t>
+              <a:t>沃尔玛中国 CTO 汇报｜AI 电商行业研究（预读版 v1.2）｜数据截至 2026-07｜内部资料·注意保密｜5</a:t>
             </a:r>
           </a:p>
         </p:txBody>
@@ -9753,7 +9753,7 @@
                 <a:latin typeface="Microsoft YaHei"/>
                 <a:ea typeface="Microsoft YaHei"/>
               </a:rPr>
-              <a:t>沃尔玛中国 CTO 汇报｜AI 电商行业研究（预读版 v1.1）｜数据截至 2026-07｜内部资料·注意保密｜6</a:t>
+              <a:t>沃尔玛中国 CTO 汇报｜AI 电商行业研究（预读版 v1.2）｜数据截至 2026-07｜内部资料·注意保密｜6</a:t>
             </a:r>
           </a:p>
         </p:txBody>
@@ -9999,7 +9999,7 @@
                 <a:latin typeface="Microsoft YaHei"/>
                 <a:ea typeface="Microsoft YaHei"/>
               </a:rPr>
-              <a:t>沃尔玛中国 CTO 汇报｜AI 电商行业研究（预读版 v1.1）｜数据截至 2026-07｜内部资料·注意保密｜7</a:t>
+              <a:t>沃尔玛中国 CTO 汇报｜AI 电商行业研究（预读版 v1.2）｜数据截至 2026-07｜内部资料·注意保密｜7</a:t>
             </a:r>
           </a:p>
         </p:txBody>
@@ -10245,7 +10245,7 @@
                 <a:latin typeface="Microsoft YaHei"/>
                 <a:ea typeface="Microsoft YaHei"/>
               </a:rPr>
-              <a:t>沃尔玛中国 CTO 汇报｜AI 电商行业研究（预读版 v1.1）｜数据截至 2026-07｜内部资料·注意保密｜8</a:t>
+              <a:t>沃尔玛中国 CTO 汇报｜AI 电商行业研究（预读版 v1.2）｜数据截至 2026-07｜内部资料·注意保密｜8</a:t>
             </a:r>
           </a:p>
         </p:txBody>
@@ -10626,7 +10626,7 @@
                 <a:latin typeface="Microsoft YaHei"/>
                 <a:ea typeface="Microsoft YaHei"/>
               </a:rPr>
-              <a:t>沃尔玛中国 CTO 汇报｜AI 电商行业研究（预读版 v1.1）｜数据截至 2026-07｜内部资料·注意保密｜9</a:t>
+              <a:t>沃尔玛中国 CTO 汇报｜AI 电商行业研究（预读版 v1.2）｜数据截至 2026-07｜内部资料·注意保密｜9</a:t>
             </a:r>
           </a:p>
         </p:txBody>
@@ -11208,7 +11208,7 @@
                           <a:latin typeface="Microsoft YaHei"/>
                           <a:ea typeface="Microsoft YaHei"/>
                         </a:rPr>
-                        <a:t>尚无规模化案例（美国仅 14% 消费者信任全自动结账）</a:t>
+                        <a:t>尚无规模化案例（美国信任全自动结账者仅约 14%，行业调查汇总口径·中置信）</a:t>
                       </a:r>
                     </a:p>
                   </a:txBody>

--- a/report/AI电商行业研究_沃尔玛中国CTO汇报.pptx
+++ b/report/AI电商行业研究_沃尔玛中国CTO汇报.pptx
@@ -3303,7 +3303,7 @@
                 <a:latin typeface="Microsoft YaHei"/>
                 <a:ea typeface="Microsoft YaHei"/>
               </a:rPr>
-              <a:t>版本：预读版 v1.2 ｜ 数据截至 2026-07 ｜ 配套预读文档 30 分钟</a:t>
+              <a:t>版本：预读版 v1.3 ｜ 数据截至 2026-07 ｜ 配套预读文档 30 分钟</a:t>
             </a:r>
           </a:p>
           <a:p>
@@ -3479,7 +3479,7 @@
                 <a:latin typeface="Microsoft YaHei"/>
                 <a:ea typeface="Microsoft YaHei"/>
               </a:rPr>
-              <a:t>入口格局：五类玩家已就位，微信系联盟模式与沃尔玛通道天然契合</a:t>
+              <a:t>入口格局：四大阵营+两个变量，微信系联盟模式与沃尔玛通道天然契合</a:t>
             </a:r>
           </a:p>
         </p:txBody>
@@ -3519,7 +3519,7 @@
                 <a:latin typeface="Microsoft YaHei"/>
                 <a:ea typeface="Microsoft YaHei"/>
               </a:rPr>
-              <a:t>沃尔玛中国 CTO 汇报｜AI 电商行业研究（预读版 v1.2）｜数据截至 2026-07｜内部资料·注意保密｜10</a:t>
+              <a:t>沃尔玛中国 CTO 汇报｜AI 电商行业研究（预读版 v1.3）｜数据截至 2026-07｜内部资料·注意保密｜10</a:t>
             </a:r>
           </a:p>
         </p:txBody>
@@ -4333,7 +4333,7 @@
                 <a:latin typeface="Microsoft YaHei"/>
                 <a:ea typeface="Microsoft YaHei"/>
               </a:rPr>
-              <a:t>沃尔玛中国 CTO 汇报｜AI 电商行业研究（预读版 v1.2）｜数据截至 2026-07｜内部资料·注意保密｜11</a:t>
+              <a:t>沃尔玛中国 CTO 汇报｜AI 电商行业研究（预读版 v1.3）｜数据截至 2026-07｜内部资料·注意保密｜11</a:t>
             </a:r>
           </a:p>
         </p:txBody>
@@ -4579,7 +4579,7 @@
                 <a:latin typeface="Microsoft YaHei"/>
                 <a:ea typeface="Microsoft YaHei"/>
               </a:rPr>
-              <a:t>沃尔玛中国 CTO 汇报｜AI 电商行业研究（预读版 v1.2）｜数据截至 2026-07｜内部资料·注意保密｜12</a:t>
+              <a:t>沃尔玛中国 CTO 汇报｜AI 电商行业研究（预读版 v1.3）｜数据截至 2026-07｜内部资料·注意保密｜12</a:t>
             </a:r>
           </a:p>
         </p:txBody>
@@ -4785,7 +4785,7 @@
                 <a:latin typeface="Microsoft YaHei"/>
                 <a:ea typeface="Microsoft YaHei"/>
               </a:rPr>
-              <a:t>两条证据线都为正：站内导购 +59%~60%；站外 AI 引荐转化优势 +42%~54%</a:t>
+              <a:t>两条证据线均为正：站内（Rufus 完成率 +60%、自有 Agent 增速溢价 +59%）；站外引荐（Adobe +42%、Shopify +54%）</a:t>
             </a:r>
           </a:p>
         </p:txBody>
@@ -4825,7 +4825,7 @@
                 <a:latin typeface="Microsoft YaHei"/>
                 <a:ea typeface="Microsoft YaHei"/>
               </a:rPr>
-              <a:t>沃尔玛中国 CTO 汇报｜AI 电商行业研究（预读版 v1.2）｜数据截至 2026-07｜内部资料·注意保密｜13</a:t>
+              <a:t>沃尔玛中国 CTO 汇报｜AI 电商行业研究（预读版 v1.3）｜数据截至 2026-07｜内部资料·注意保密｜13</a:t>
             </a:r>
           </a:p>
         </p:txBody>
@@ -4889,7 +4889,7 @@
                 <a:latin typeface="Microsoft YaHei"/>
                 <a:ea typeface="Microsoft YaHei"/>
               </a:rPr>
-              <a:t>决策含义：站内导购与站外引荐口径不同、分开呈现（不合并为单一区间）；京东斜纹柱不参与判断——结论不依赖低置信数据。</a:t>
+              <a:t>决策含义：四个数字口径各不相同、只并列不合并；京东斜纹柱不参与判断——结论不依赖低置信数据。</a:t>
             </a:r>
           </a:p>
         </p:txBody>
@@ -5071,7 +5071,7 @@
                 <a:latin typeface="Microsoft YaHei"/>
                 <a:ea typeface="Microsoft YaHei"/>
               </a:rPr>
-              <a:t>沃尔玛中国 CTO 汇报｜AI 电商行业研究（预读版 v1.2）｜数据截至 2026-07｜内部资料·注意保密｜14</a:t>
+              <a:t>沃尔玛中国 CTO 汇报｜AI 电商行业研究（预读版 v1.3）｜数据截至 2026-07｜内部资料·注意保密｜14</a:t>
             </a:r>
           </a:p>
         </p:txBody>
@@ -5888,7 +5888,7 @@
                 <a:latin typeface="Microsoft YaHei"/>
                 <a:ea typeface="Microsoft YaHei"/>
               </a:rPr>
-              <a:t>沃尔玛中国 CTO 汇报｜AI 电商行业研究（预读版 v1.2）｜数据截至 2026-07｜内部资料·注意保密｜15</a:t>
+              <a:t>沃尔玛中国 CTO 汇报｜AI 电商行业研究（预读版 v1.3）｜数据截至 2026-07｜内部资料·注意保密｜15</a:t>
             </a:r>
           </a:p>
         </p:txBody>
@@ -6309,7 +6309,7 @@
                 <a:latin typeface="Microsoft YaHei"/>
                 <a:ea typeface="Microsoft YaHei"/>
               </a:rPr>
-              <a:t>沃尔玛中国 CTO 汇报｜AI 电商行业研究（预读版 v1.2）｜数据截至 2026-07｜内部资料·注意保密｜16</a:t>
+              <a:t>沃尔玛中国 CTO 汇报｜AI 电商行业研究（预读版 v1.3）｜数据截至 2026-07｜内部资料·注意保密｜16</a:t>
             </a:r>
           </a:p>
         </p:txBody>
@@ -6753,7 +6753,7 @@
                 <a:latin typeface="Microsoft YaHei"/>
                 <a:ea typeface="Microsoft YaHei"/>
               </a:rPr>
-              <a:t>不建议：①把结账交给第三方 AI（全球已证伪）；②在淘宝/抖音竞对生态做深度绑定；③等『中立比价 AI』出现（国内大概率伪命题）。</a:t>
+              <a:t>不建议：①把结账交给第三方 AI（全球已证伪）；②在淘宝/抖音竞对生态深度绑定；③等『中立比价 AI』（国内大概率伪命题）。Build 前必答：国内暂无对标 Instacart 的成熟生鲜白标；若出现，以数据不出域/会员隔离/TCO 三判据重评 Build vs Buy。</a:t>
             </a:r>
           </a:p>
         </p:txBody>
@@ -6935,7 +6935,7 @@
                 <a:latin typeface="Microsoft YaHei"/>
                 <a:ea typeface="Microsoft YaHei"/>
               </a:rPr>
-              <a:t>沃尔玛中国 CTO 汇报｜AI 电商行业研究（预读版 v1.2）｜数据截至 2026-07｜内部资料·注意保密｜17</a:t>
+              <a:t>沃尔玛中国 CTO 汇报｜AI 电商行业研究（预读版 v1.3）｜数据截至 2026-07｜内部资料·注意保密｜17</a:t>
             </a:r>
           </a:p>
         </p:txBody>
@@ -7589,7 +7589,7 @@
                 <a:latin typeface="Microsoft YaHei"/>
                 <a:ea typeface="Microsoft YaHei"/>
               </a:rPr>
-              <a:t>资源诉求（CTO 决策）：8~12 人虚拟团队（90 天约 24~36 人月）；国内合规模型栈选型（混元/DeepSeek/通义）；第三方数据约百万元级/年；首期 90 天总预算量级=数百万元级人民币（立项讨论用估算，财务核价出准数）。</a:t>
+              <a:t>资源诉求（CTO 决策）：首期 90 天总预算约 200~450 万元（人力 24~36 人月按全成本 6~9 万/人月假设 + 推理 20~80 万 + 数据分摊约 25 万 + 合规咨询 10~30 万；立项讨论用估算，财务核价出准数）；国内合规模型栈选型（混元/DeepSeek/通义）。</a:t>
             </a:r>
           </a:p>
         </p:txBody>
@@ -7771,7 +7771,7 @@
                 <a:latin typeface="Microsoft YaHei"/>
                 <a:ea typeface="Microsoft YaHei"/>
               </a:rPr>
-              <a:t>沃尔玛中国 CTO 汇报｜AI 电商行业研究（预读版 v1.2）｜数据截至 2026-07｜内部资料·注意保密｜18</a:t>
+              <a:t>沃尔玛中国 CTO 汇报｜AI 电商行业研究（预读版 v1.3）｜数据截至 2026-07｜内部资料·注意保密｜18</a:t>
             </a:r>
           </a:p>
         </p:txBody>
@@ -8220,7 +8220,7 @@
                 <a:latin typeface="Microsoft YaHei"/>
                 <a:ea typeface="Microsoft YaHei"/>
               </a:rPr>
-              <a:t>沃尔玛中国 CTO 汇报｜AI 电商行业研究（预读版 v1.2）｜数据截至 2026-07｜内部资料·注意保密｜19</a:t>
+              <a:t>沃尔玛中国 CTO 汇报｜AI 电商行业研究（预读版 v1.3）｜数据截至 2026-07｜内部资料·注意保密｜19</a:t>
             </a:r>
           </a:p>
         </p:txBody>
@@ -8567,7 +8567,7 @@
                 <a:latin typeface="Microsoft YaHei"/>
                 <a:ea typeface="Microsoft YaHei"/>
               </a:rPr>
-              <a:t>沃尔玛中国 CTO 汇报｜AI 电商行业研究（预读版 v1.2）｜数据截至 2026-07｜内部资料·注意保密｜2</a:t>
+              <a:t>沃尔玛中国 CTO 汇报｜AI 电商行业研究（预读版 v1.3）｜数据截至 2026-07｜内部资料·注意保密｜2</a:t>
             </a:r>
           </a:p>
         </p:txBody>
@@ -8914,7 +8914,7 @@
                 <a:latin typeface="Microsoft YaHei"/>
                 <a:ea typeface="Microsoft YaHei"/>
               </a:rPr>
-              <a:t>沃尔玛中国 CTO 汇报｜AI 电商行业研究（预读版 v1.2）｜数据截至 2026-07｜内部资料·注意保密｜3</a:t>
+              <a:t>沃尔玛中国 CTO 汇报｜AI 电商行业研究（预读版 v1.3）｜数据截至 2026-07｜内部资料·注意保密｜3</a:t>
             </a:r>
           </a:p>
         </p:txBody>
@@ -9261,7 +9261,7 @@
                 <a:latin typeface="Microsoft YaHei"/>
                 <a:ea typeface="Microsoft YaHei"/>
               </a:rPr>
-              <a:t>沃尔玛中国 CTO 汇报｜AI 电商行业研究（预读版 v1.2）｜数据截至 2026-07｜内部资料·注意保密｜4</a:t>
+              <a:t>沃尔玛中国 CTO 汇报｜AI 电商行业研究（预读版 v1.3）｜数据截至 2026-07｜内部资料·注意保密｜4</a:t>
             </a:r>
           </a:p>
         </p:txBody>
@@ -9507,7 +9507,7 @@
                 <a:latin typeface="Microsoft YaHei"/>
                 <a:ea typeface="Microsoft YaHei"/>
               </a:rPr>
-              <a:t>沃尔玛中国 CTO 汇报｜AI 电商行业研究（预读版 v1.2）｜数据截至 2026-07｜内部资料·注意保密｜5</a:t>
+              <a:t>沃尔玛中国 CTO 汇报｜AI 电商行业研究（预读版 v1.3）｜数据截至 2026-07｜内部资料·注意保密｜5</a:t>
             </a:r>
           </a:p>
         </p:txBody>
@@ -9753,7 +9753,7 @@
                 <a:latin typeface="Microsoft YaHei"/>
                 <a:ea typeface="Microsoft YaHei"/>
               </a:rPr>
-              <a:t>沃尔玛中国 CTO 汇报｜AI 电商行业研究（预读版 v1.2）｜数据截至 2026-07｜内部资料·注意保密｜6</a:t>
+              <a:t>沃尔玛中国 CTO 汇报｜AI 电商行业研究（预读版 v1.3）｜数据截至 2026-07｜内部资料·注意保密｜6</a:t>
             </a:r>
           </a:p>
         </p:txBody>
@@ -9999,7 +9999,7 @@
                 <a:latin typeface="Microsoft YaHei"/>
                 <a:ea typeface="Microsoft YaHei"/>
               </a:rPr>
-              <a:t>沃尔玛中国 CTO 汇报｜AI 电商行业研究（预读版 v1.2）｜数据截至 2026-07｜内部资料·注意保密｜7</a:t>
+              <a:t>沃尔玛中国 CTO 汇报｜AI 电商行业研究（预读版 v1.3）｜数据截至 2026-07｜内部资料·注意保密｜7</a:t>
             </a:r>
           </a:p>
         </p:txBody>
@@ -10245,7 +10245,7 @@
                 <a:latin typeface="Microsoft YaHei"/>
                 <a:ea typeface="Microsoft YaHei"/>
               </a:rPr>
-              <a:t>沃尔玛中国 CTO 汇报｜AI 电商行业研究（预读版 v1.2）｜数据截至 2026-07｜内部资料·注意保密｜8</a:t>
+              <a:t>沃尔玛中国 CTO 汇报｜AI 电商行业研究（预读版 v1.3）｜数据截至 2026-07｜内部资料·注意保密｜8</a:t>
             </a:r>
           </a:p>
         </p:txBody>
@@ -10626,7 +10626,7 @@
                 <a:latin typeface="Microsoft YaHei"/>
                 <a:ea typeface="Microsoft YaHei"/>
               </a:rPr>
-              <a:t>沃尔玛中国 CTO 汇报｜AI 电商行业研究（预读版 v1.2）｜数据截至 2026-07｜内部资料·注意保密｜9</a:t>
+              <a:t>沃尔玛中国 CTO 汇报｜AI 电商行业研究（预读版 v1.3）｜数据截至 2026-07｜内部资料·注意保密｜9</a:t>
             </a:r>
           </a:p>
         </p:txBody>
@@ -11208,7 +11208,7 @@
                           <a:latin typeface="Microsoft YaHei"/>
                           <a:ea typeface="Microsoft YaHei"/>
                         </a:rPr>
-                        <a:t>尚无规模化案例（美国信任全自动结账者仅约 14%，行业调查汇总口径·中置信）</a:t>
+                        <a:t>尚无规模化案例（美国信任全自动结账者仅约 14%，行业调查汇总口径·中置信·待溯源）</a:t>
                       </a:r>
                     </a:p>
                   </a:txBody>
